--- a/public/lessons/year-6-maths/spring/week-18/solve-ratio-problems/teaching-powerpoint-v1.pptx
+++ b/public/lessons/year-6-maths/spring/week-18/solve-ratio-problems/teaching-powerpoint-v1.pptx
@@ -2,24 +2,24 @@
 <file path=ppt/presentation.xml><?xml version="1.0" encoding="utf-8"?>
 <p:presentation xmlns:p="http://schemas.openxmlformats.org/presentationml/2006/main">
   <p:sldMasterIdLst>
-    <p:sldMasterId xmlns:r="http://schemas.openxmlformats.org/officeDocument/2006/relationships" id="2147483648" r:id="R35c07fe3d966456d"/>
+    <p:sldMasterId xmlns:r="http://schemas.openxmlformats.org/officeDocument/2006/relationships" id="2147483648" r:id="R76ca07d530674357"/>
   </p:sldMasterIdLst>
   <p:notesMasterIdLst>
-    <p:notesMasterId xmlns:r="http://schemas.openxmlformats.org/officeDocument/2006/relationships" r:id="R17dff4d4dad54157"/>
+    <p:notesMasterId xmlns:r="http://schemas.openxmlformats.org/officeDocument/2006/relationships" r:id="R05d09558bde24812"/>
   </p:notesMasterIdLst>
   <p:sldIdLst>
-    <p:sldId xmlns:r="http://schemas.openxmlformats.org/officeDocument/2006/relationships" id="256" r:id="R5da780e2e5044383"/>
-    <p:sldId xmlns:r="http://schemas.openxmlformats.org/officeDocument/2006/relationships" id="257" r:id="R2f0fe80c1d854290"/>
-    <p:sldId xmlns:r="http://schemas.openxmlformats.org/officeDocument/2006/relationships" id="258" r:id="R507e59a89b9b48e6"/>
-    <p:sldId xmlns:r="http://schemas.openxmlformats.org/officeDocument/2006/relationships" id="259" r:id="R5cfb8e3527104e5b"/>
-    <p:sldId xmlns:r="http://schemas.openxmlformats.org/officeDocument/2006/relationships" id="260" r:id="R5c5da695fd354d5a"/>
-    <p:sldId xmlns:r="http://schemas.openxmlformats.org/officeDocument/2006/relationships" id="261" r:id="R15e8dc9242ff4555"/>
-    <p:sldId xmlns:r="http://schemas.openxmlformats.org/officeDocument/2006/relationships" id="262" r:id="R33ff6724632d419a"/>
-    <p:sldId xmlns:r="http://schemas.openxmlformats.org/officeDocument/2006/relationships" id="263" r:id="R93ef0b25936643d1"/>
-    <p:sldId xmlns:r="http://schemas.openxmlformats.org/officeDocument/2006/relationships" id="264" r:id="Rab3e7bb0c567446b"/>
-    <p:sldId xmlns:r="http://schemas.openxmlformats.org/officeDocument/2006/relationships" id="265" r:id="R3965390bbddf45a1"/>
-    <p:sldId xmlns:r="http://schemas.openxmlformats.org/officeDocument/2006/relationships" id="266" r:id="R6df97f0a9ea14df5"/>
-    <p:sldId xmlns:r="http://schemas.openxmlformats.org/officeDocument/2006/relationships" id="267" r:id="R5f4454a73f79480f"/>
+    <p:sldId xmlns:r="http://schemas.openxmlformats.org/officeDocument/2006/relationships" id="256" r:id="R9ef04b00b43b411e"/>
+    <p:sldId xmlns:r="http://schemas.openxmlformats.org/officeDocument/2006/relationships" id="257" r:id="R016e437589864d02"/>
+    <p:sldId xmlns:r="http://schemas.openxmlformats.org/officeDocument/2006/relationships" id="258" r:id="R9804adf78f5e4dad"/>
+    <p:sldId xmlns:r="http://schemas.openxmlformats.org/officeDocument/2006/relationships" id="259" r:id="Re490735296134c55"/>
+    <p:sldId xmlns:r="http://schemas.openxmlformats.org/officeDocument/2006/relationships" id="260" r:id="R676f606511f44151"/>
+    <p:sldId xmlns:r="http://schemas.openxmlformats.org/officeDocument/2006/relationships" id="261" r:id="Rb856e2c3d02543e8"/>
+    <p:sldId xmlns:r="http://schemas.openxmlformats.org/officeDocument/2006/relationships" id="262" r:id="R8f030d8eb89a430f"/>
+    <p:sldId xmlns:r="http://schemas.openxmlformats.org/officeDocument/2006/relationships" id="263" r:id="R4e14f14feeff441d"/>
+    <p:sldId xmlns:r="http://schemas.openxmlformats.org/officeDocument/2006/relationships" id="264" r:id="R8522a3cde55644af"/>
+    <p:sldId xmlns:r="http://schemas.openxmlformats.org/officeDocument/2006/relationships" id="265" r:id="Rf30d8b2f27944940"/>
+    <p:sldId xmlns:r="http://schemas.openxmlformats.org/officeDocument/2006/relationships" id="266" r:id="R6de60d04ae0c4b30"/>
+    <p:sldId xmlns:r="http://schemas.openxmlformats.org/officeDocument/2006/relationships" id="267" r:id="Rbf6c5eadbd9c4b4e"/>
   </p:sldIdLst>
   <p:sldSz cx="12192000" cy="6858000"/>
   <p:notesSz cx="6858000" cy="9144000"/>
@@ -873,7 +873,7 @@
           <a:lstStyle xmlns:a="http://schemas.openxmlformats.org/drawingml/2006/main"/>
           <a:p xmlns:a="http://schemas.openxmlformats.org/drawingml/2006/main">
             <a:r>
-              <a:t>I do. Reveal the question, setup and each calculation stage one click at a time. Pupils watch before copying. Model answer: 30 ml.</a:t>
+              <a:t>I do. Reveal the question, then reveal each mathematical change one click at a time. Point to the numbers and operation that changed before moving to the next line. Final answer: 30 ml.</a:t>
             </a:r>
           </a:p>
         </p:txBody>
@@ -1291,7 +1291,7 @@
   </p:cSld>
   <p:clrMap bg1="lt1" tx1="dk1" bg2="lt2" tx2="dk2" accent1="accent1" accent2="accent2" accent3="accent3" accent4="accent4" accent5="accent5" accent6="accent6" hlink="hlink" folHlink="folHlink"/>
   <p:sldLayoutIdLst>
-    <p:sldLayoutId xmlns:r="http://schemas.openxmlformats.org/officeDocument/2006/relationships" id="2147483649" r:id="R22c69d4c7ae04999"/>
+    <p:sldLayoutId xmlns:r="http://schemas.openxmlformats.org/officeDocument/2006/relationships" id="2147483649" r:id="R640a9aa6db674b34"/>
   </p:sldLayoutIdLst>
   <p:txStyles>
     <p:titleStyle>
@@ -1842,7 +1842,7 @@
           <p:cNvPr id="12" name="">
             <a:extLst xmlns:a="http://schemas.openxmlformats.org/drawingml/2006/main">
               <a:ext uri="{FF2B5EF4-FFF2-40B4-BE49-F238E27FC236}">
-                <a16:creationId xmlns:a16="http://schemas.microsoft.com/office/drawing/2014/main" id="{7F6B9D86-19AC-4967-8116-0D46E607B176}"/>
+                <a16:creationId xmlns:a16="http://schemas.microsoft.com/office/drawing/2014/main" id="{EDAA335A-3F52-49AB-AF48-BEA97E2C8BF8}"/>
               </a:ext>
             </a:extLst>
           </p:cNvPr>
@@ -1874,7 +1874,7 @@
           <p:cNvPr id="2" name="">
             <a:extLst xmlns:a="http://schemas.openxmlformats.org/drawingml/2006/main">
               <a:ext uri="{FF2B5EF4-FFF2-40B4-BE49-F238E27FC236}">
-                <a16:creationId xmlns:a16="http://schemas.microsoft.com/office/drawing/2014/main" id="{81189911-395C-4C18-940D-8A74C662C181}"/>
+                <a16:creationId xmlns:a16="http://schemas.microsoft.com/office/drawing/2014/main" id="{EFC8DF78-0E80-4986-84F7-2CB04CA7D520}"/>
               </a:ext>
             </a:extLst>
           </p:cNvPr>
@@ -1931,7 +1931,7 @@
           <p:cNvPr id="3" name="">
             <a:extLst xmlns:a="http://schemas.openxmlformats.org/drawingml/2006/main">
               <a:ext uri="{FF2B5EF4-FFF2-40B4-BE49-F238E27FC236}">
-                <a16:creationId xmlns:a16="http://schemas.microsoft.com/office/drawing/2014/main" id="{DB3C1141-673B-46B3-8B43-7904817BD6E1}"/>
+                <a16:creationId xmlns:a16="http://schemas.microsoft.com/office/drawing/2014/main" id="{FE02E27C-AF2C-49AB-888F-6523FED482B8}"/>
               </a:ext>
             </a:extLst>
           </p:cNvPr>
@@ -1965,7 +1965,7 @@
           <p:cNvPr id="4" name="">
             <a:extLst xmlns:a="http://schemas.openxmlformats.org/drawingml/2006/main">
               <a:ext uri="{FF2B5EF4-FFF2-40B4-BE49-F238E27FC236}">
-                <a16:creationId xmlns:a16="http://schemas.microsoft.com/office/drawing/2014/main" id="{93B2A0D1-5E86-4D52-8C5F-C0E1CB1AFC6B}"/>
+                <a16:creationId xmlns:a16="http://schemas.microsoft.com/office/drawing/2014/main" id="{D171D4A5-3FEA-4EF8-9789-2C3A74A3E8B2}"/>
               </a:ext>
             </a:extLst>
           </p:cNvPr>
@@ -2022,7 +2022,7 @@
           <p:cNvPr id="5" name="">
             <a:extLst xmlns:a="http://schemas.openxmlformats.org/drawingml/2006/main">
               <a:ext uri="{FF2B5EF4-FFF2-40B4-BE49-F238E27FC236}">
-                <a16:creationId xmlns:a16="http://schemas.microsoft.com/office/drawing/2014/main" id="{7B25B4E9-C09C-494F-A48B-3D77A7D61762}"/>
+                <a16:creationId xmlns:a16="http://schemas.microsoft.com/office/drawing/2014/main" id="{A9227C5B-FDBA-4494-9C1D-6BCBAA9661CB}"/>
               </a:ext>
             </a:extLst>
           </p:cNvPr>
@@ -2079,7 +2079,7 @@
           <p:cNvPr id="6" name="">
             <a:extLst xmlns:a="http://schemas.openxmlformats.org/drawingml/2006/main">
               <a:ext uri="{FF2B5EF4-FFF2-40B4-BE49-F238E27FC236}">
-                <a16:creationId xmlns:a16="http://schemas.microsoft.com/office/drawing/2014/main" id="{C448BBCE-C93A-463A-9583-5B7CDE963A8D}"/>
+                <a16:creationId xmlns:a16="http://schemas.microsoft.com/office/drawing/2014/main" id="{CD865E17-19F1-434F-9C3C-E496935E2E61}"/>
               </a:ext>
             </a:extLst>
           </p:cNvPr>
@@ -2113,7 +2113,7 @@
           <p:cNvPr id="7" name="">
             <a:extLst xmlns:a="http://schemas.openxmlformats.org/drawingml/2006/main">
               <a:ext uri="{FF2B5EF4-FFF2-40B4-BE49-F238E27FC236}">
-                <a16:creationId xmlns:a16="http://schemas.microsoft.com/office/drawing/2014/main" id="{B5259391-52BF-4974-B612-F7472064D6D4}"/>
+                <a16:creationId xmlns:a16="http://schemas.microsoft.com/office/drawing/2014/main" id="{F1E1DF06-330E-49E8-8856-C33319B6D4E5}"/>
               </a:ext>
             </a:extLst>
           </p:cNvPr>
@@ -2170,7 +2170,7 @@
           <p:cNvPr id="8" name="">
             <a:extLst xmlns:a="http://schemas.openxmlformats.org/drawingml/2006/main">
               <a:ext uri="{FF2B5EF4-FFF2-40B4-BE49-F238E27FC236}">
-                <a16:creationId xmlns:a16="http://schemas.microsoft.com/office/drawing/2014/main" id="{5F83F0DD-C6FF-42E1-83C9-24E20EB47507}"/>
+                <a16:creationId xmlns:a16="http://schemas.microsoft.com/office/drawing/2014/main" id="{8B05798C-B1D5-4773-9458-763103BD0F73}"/>
               </a:ext>
             </a:extLst>
           </p:cNvPr>
@@ -2227,7 +2227,7 @@
           <p:cNvPr id="9" name="">
             <a:extLst xmlns:a="http://schemas.openxmlformats.org/drawingml/2006/main">
               <a:ext uri="{FF2B5EF4-FFF2-40B4-BE49-F238E27FC236}">
-                <a16:creationId xmlns:a16="http://schemas.microsoft.com/office/drawing/2014/main" id="{D3304427-D0A1-4812-88B2-F8DE41755F60}"/>
+                <a16:creationId xmlns:a16="http://schemas.microsoft.com/office/drawing/2014/main" id="{E5D73DA4-C288-4DEF-9EA6-FFDB33290C27}"/>
               </a:ext>
             </a:extLst>
           </p:cNvPr>
@@ -2284,7 +2284,7 @@
           <p:cNvPr id="10" name="">
             <a:extLst xmlns:a="http://schemas.openxmlformats.org/drawingml/2006/main">
               <a:ext uri="{FF2B5EF4-FFF2-40B4-BE49-F238E27FC236}">
-                <a16:creationId xmlns:a16="http://schemas.microsoft.com/office/drawing/2014/main" id="{550AD795-2F4C-4658-A781-9D5CAD18E214}"/>
+                <a16:creationId xmlns:a16="http://schemas.microsoft.com/office/drawing/2014/main" id="{D950BA31-EBED-4DE4-8194-0F87AFD62F8B}"/>
               </a:ext>
             </a:extLst>
           </p:cNvPr>
@@ -2341,7 +2341,7 @@
           <p:cNvPr id="11" name="">
             <a:extLst xmlns:a="http://schemas.openxmlformats.org/drawingml/2006/main">
               <a:ext uri="{FF2B5EF4-FFF2-40B4-BE49-F238E27FC236}">
-                <a16:creationId xmlns:a16="http://schemas.microsoft.com/office/drawing/2014/main" id="{5DCF886B-1CAE-4684-BE5A-694EADBB809E}"/>
+                <a16:creationId xmlns:a16="http://schemas.microsoft.com/office/drawing/2014/main" id="{DC2ACEE0-5E39-45E2-8A8D-40F6A1CA1B27}"/>
               </a:ext>
             </a:extLst>
           </p:cNvPr>
@@ -2396,7 +2396,7 @@
     </p:spTree>
     <p:extLst>
       <p:ext uri="{BB962C8B-B14F-4D97-AF65-F5344CB8AC3E}">
-        <p14:creationId xmlns:p14="http://schemas.microsoft.com/office/powerpoint/2010/main" val="804849906"/>
+        <p14:creationId xmlns:p14="http://schemas.microsoft.com/office/powerpoint/2010/main" val="1866911868"/>
       </p:ext>
     </p:extLst>
   </p:cSld>
@@ -2427,7 +2427,7 @@
           <p:cNvPr id="14" name="">
             <a:extLst xmlns:a="http://schemas.openxmlformats.org/drawingml/2006/main">
               <a:ext uri="{FF2B5EF4-FFF2-40B4-BE49-F238E27FC236}">
-                <a16:creationId xmlns:a16="http://schemas.microsoft.com/office/drawing/2014/main" id="{CFAE52FE-F0F4-4BD7-B128-76344E5CC73E}"/>
+                <a16:creationId xmlns:a16="http://schemas.microsoft.com/office/drawing/2014/main" id="{0E4B072A-FA4A-4995-A941-AC7E97080B16}"/>
               </a:ext>
             </a:extLst>
           </p:cNvPr>
@@ -2459,7 +2459,7 @@
           <p:cNvPr id="2" name="">
             <a:extLst xmlns:a="http://schemas.openxmlformats.org/drawingml/2006/main">
               <a:ext uri="{FF2B5EF4-FFF2-40B4-BE49-F238E27FC236}">
-                <a16:creationId xmlns:a16="http://schemas.microsoft.com/office/drawing/2014/main" id="{0687C1D6-A080-47A5-9E7A-F907E11D3A90}"/>
+                <a16:creationId xmlns:a16="http://schemas.microsoft.com/office/drawing/2014/main" id="{0064B7D1-35C4-43C3-A9F9-5A6A1121AF45}"/>
               </a:ext>
             </a:extLst>
           </p:cNvPr>
@@ -2516,7 +2516,7 @@
           <p:cNvPr id="3" name="">
             <a:extLst xmlns:a="http://schemas.openxmlformats.org/drawingml/2006/main">
               <a:ext uri="{FF2B5EF4-FFF2-40B4-BE49-F238E27FC236}">
-                <a16:creationId xmlns:a16="http://schemas.microsoft.com/office/drawing/2014/main" id="{01BCC5DF-B5EF-4695-AE91-F6F025D054DB}"/>
+                <a16:creationId xmlns:a16="http://schemas.microsoft.com/office/drawing/2014/main" id="{4E03AA6E-5AD8-4201-A7AF-B749157AA62A}"/>
               </a:ext>
             </a:extLst>
           </p:cNvPr>
@@ -2548,7 +2548,7 @@
           <p:cNvPr id="4" name="">
             <a:extLst xmlns:a="http://schemas.openxmlformats.org/drawingml/2006/main">
               <a:ext uri="{FF2B5EF4-FFF2-40B4-BE49-F238E27FC236}">
-                <a16:creationId xmlns:a16="http://schemas.microsoft.com/office/drawing/2014/main" id="{BF324692-CD1A-4855-A96A-862AD9E15D9F}"/>
+                <a16:creationId xmlns:a16="http://schemas.microsoft.com/office/drawing/2014/main" id="{0CAC4CC7-0FA6-48B6-A732-8177112B835A}"/>
               </a:ext>
             </a:extLst>
           </p:cNvPr>
@@ -2605,7 +2605,7 @@
           <p:cNvPr id="5" name="">
             <a:extLst xmlns:a="http://schemas.openxmlformats.org/drawingml/2006/main">
               <a:ext uri="{FF2B5EF4-FFF2-40B4-BE49-F238E27FC236}">
-                <a16:creationId xmlns:a16="http://schemas.microsoft.com/office/drawing/2014/main" id="{FFC87150-D744-4D34-B448-AEA8ACAE4393}"/>
+                <a16:creationId xmlns:a16="http://schemas.microsoft.com/office/drawing/2014/main" id="{5F882861-9E1F-4799-A016-6B805B2CAC7E}"/>
               </a:ext>
             </a:extLst>
           </p:cNvPr>
@@ -2662,7 +2662,7 @@
           <p:cNvPr id="6" name="">
             <a:extLst xmlns:a="http://schemas.openxmlformats.org/drawingml/2006/main">
               <a:ext uri="{FF2B5EF4-FFF2-40B4-BE49-F238E27FC236}">
-                <a16:creationId xmlns:a16="http://schemas.microsoft.com/office/drawing/2014/main" id="{FE8A0952-E59C-46C4-989A-E0923CA4899C}"/>
+                <a16:creationId xmlns:a16="http://schemas.microsoft.com/office/drawing/2014/main" id="{42BEB8B0-E376-4519-80E9-B738A57944DC}"/>
               </a:ext>
             </a:extLst>
           </p:cNvPr>
@@ -2719,7 +2719,7 @@
           <p:cNvPr id="7" name="">
             <a:extLst xmlns:a="http://schemas.openxmlformats.org/drawingml/2006/main">
               <a:ext uri="{FF2B5EF4-FFF2-40B4-BE49-F238E27FC236}">
-                <a16:creationId xmlns:a16="http://schemas.microsoft.com/office/drawing/2014/main" id="{4BFF6F53-3299-4DB0-B0FE-94CCC162268D}"/>
+                <a16:creationId xmlns:a16="http://schemas.microsoft.com/office/drawing/2014/main" id="{DB5B0210-71DF-4D3F-A9C0-883A868DF314}"/>
               </a:ext>
             </a:extLst>
           </p:cNvPr>
@@ -2751,7 +2751,7 @@
           <p:cNvPr id="8" name="">
             <a:extLst xmlns:a="http://schemas.openxmlformats.org/drawingml/2006/main">
               <a:ext uri="{FF2B5EF4-FFF2-40B4-BE49-F238E27FC236}">
-                <a16:creationId xmlns:a16="http://schemas.microsoft.com/office/drawing/2014/main" id="{C7839185-E8A9-4578-BF15-AFB3E4703718}"/>
+                <a16:creationId xmlns:a16="http://schemas.microsoft.com/office/drawing/2014/main" id="{53DCF63E-3FBE-4588-9CE4-2B9A3B9C59BE}"/>
               </a:ext>
             </a:extLst>
           </p:cNvPr>
@@ -2808,7 +2808,7 @@
           <p:cNvPr id="9" name="">
             <a:extLst xmlns:a="http://schemas.openxmlformats.org/drawingml/2006/main">
               <a:ext uri="{FF2B5EF4-FFF2-40B4-BE49-F238E27FC236}">
-                <a16:creationId xmlns:a16="http://schemas.microsoft.com/office/drawing/2014/main" id="{271144B7-126D-41E8-AF4A-5E73D7184953}"/>
+                <a16:creationId xmlns:a16="http://schemas.microsoft.com/office/drawing/2014/main" id="{F7179886-9657-4CD6-8580-80B81BA9F442}"/>
               </a:ext>
             </a:extLst>
           </p:cNvPr>
@@ -2865,7 +2865,7 @@
           <p:cNvPr id="10" name="">
             <a:extLst xmlns:a="http://schemas.openxmlformats.org/drawingml/2006/main">
               <a:ext uri="{FF2B5EF4-FFF2-40B4-BE49-F238E27FC236}">
-                <a16:creationId xmlns:a16="http://schemas.microsoft.com/office/drawing/2014/main" id="{9C002777-5054-4876-BDF2-F63CCD2A16B0}"/>
+                <a16:creationId xmlns:a16="http://schemas.microsoft.com/office/drawing/2014/main" id="{7D5680ED-0169-4FA8-96AA-5510A47F393A}"/>
               </a:ext>
             </a:extLst>
           </p:cNvPr>
@@ -2922,7 +2922,7 @@
           <p:cNvPr id="11" name="">
             <a:extLst xmlns:a="http://schemas.openxmlformats.org/drawingml/2006/main">
               <a:ext uri="{FF2B5EF4-FFF2-40B4-BE49-F238E27FC236}">
-                <a16:creationId xmlns:a16="http://schemas.microsoft.com/office/drawing/2014/main" id="{04D4718A-972F-41E3-9BF4-89BFC790CE49}"/>
+                <a16:creationId xmlns:a16="http://schemas.microsoft.com/office/drawing/2014/main" id="{B5FE4967-6C90-4DE1-88A2-BA23346D88C8}"/>
               </a:ext>
             </a:extLst>
           </p:cNvPr>
@@ -2979,7 +2979,7 @@
           <p:cNvPr id="12" name="">
             <a:extLst xmlns:a="http://schemas.openxmlformats.org/drawingml/2006/main">
               <a:ext uri="{FF2B5EF4-FFF2-40B4-BE49-F238E27FC236}">
-                <a16:creationId xmlns:a16="http://schemas.microsoft.com/office/drawing/2014/main" id="{5E796281-3A8E-41DA-9AD2-D918DB7B94CB}"/>
+                <a16:creationId xmlns:a16="http://schemas.microsoft.com/office/drawing/2014/main" id="{62830A27-9F8E-47DE-ADF0-8F55F6838B71}"/>
               </a:ext>
             </a:extLst>
           </p:cNvPr>
@@ -3036,7 +3036,7 @@
           <p:cNvPr id="13" name="">
             <a:extLst xmlns:a="http://schemas.openxmlformats.org/drawingml/2006/main">
               <a:ext uri="{FF2B5EF4-FFF2-40B4-BE49-F238E27FC236}">
-                <a16:creationId xmlns:a16="http://schemas.microsoft.com/office/drawing/2014/main" id="{38CC511A-5594-4AFD-8837-413740F58109}"/>
+                <a16:creationId xmlns:a16="http://schemas.microsoft.com/office/drawing/2014/main" id="{D269441B-861D-4E58-8FBA-364F02E21C05}"/>
               </a:ext>
             </a:extLst>
           </p:cNvPr>
@@ -3091,7 +3091,7 @@
     </p:spTree>
     <p:extLst>
       <p:ext uri="{BB962C8B-B14F-4D97-AF65-F5344CB8AC3E}">
-        <p14:creationId xmlns:p14="http://schemas.microsoft.com/office/powerpoint/2010/main" val="1335605390"/>
+        <p14:creationId xmlns:p14="http://schemas.microsoft.com/office/powerpoint/2010/main" val="1899964380"/>
       </p:ext>
     </p:extLst>
   </p:cSld>
@@ -3292,7 +3292,7 @@
           <p:cNvPr id="19" name="">
             <a:extLst xmlns:a="http://schemas.openxmlformats.org/drawingml/2006/main">
               <a:ext uri="{FF2B5EF4-FFF2-40B4-BE49-F238E27FC236}">
-                <a16:creationId xmlns:a16="http://schemas.microsoft.com/office/drawing/2014/main" id="{987D4F80-50FA-4C36-A7E5-952F170214C6}"/>
+                <a16:creationId xmlns:a16="http://schemas.microsoft.com/office/drawing/2014/main" id="{059C72BF-6DC5-4F67-94D4-139DFF6FC521}"/>
               </a:ext>
             </a:extLst>
           </p:cNvPr>
@@ -3324,7 +3324,7 @@
           <p:cNvPr id="2" name="">
             <a:extLst xmlns:a="http://schemas.openxmlformats.org/drawingml/2006/main">
               <a:ext uri="{FF2B5EF4-FFF2-40B4-BE49-F238E27FC236}">
-                <a16:creationId xmlns:a16="http://schemas.microsoft.com/office/drawing/2014/main" id="{B234A79B-E85B-40D8-B603-CF8F4CF07E31}"/>
+                <a16:creationId xmlns:a16="http://schemas.microsoft.com/office/drawing/2014/main" id="{DDC2C2D4-96C2-4FD7-A438-45DBECE2BB08}"/>
               </a:ext>
             </a:extLst>
           </p:cNvPr>
@@ -3381,7 +3381,7 @@
           <p:cNvPr id="3" name="">
             <a:extLst xmlns:a="http://schemas.openxmlformats.org/drawingml/2006/main">
               <a:ext uri="{FF2B5EF4-FFF2-40B4-BE49-F238E27FC236}">
-                <a16:creationId xmlns:a16="http://schemas.microsoft.com/office/drawing/2014/main" id="{D768F6FC-94AB-4EAE-8B1F-5FE2A2222879}"/>
+                <a16:creationId xmlns:a16="http://schemas.microsoft.com/office/drawing/2014/main" id="{4C9A7797-6A23-4EA2-ABAA-A88EBF1BBFFA}"/>
               </a:ext>
             </a:extLst>
           </p:cNvPr>
@@ -3413,7 +3413,7 @@
           <p:cNvPr id="4" name="">
             <a:extLst xmlns:a="http://schemas.openxmlformats.org/drawingml/2006/main">
               <a:ext uri="{FF2B5EF4-FFF2-40B4-BE49-F238E27FC236}">
-                <a16:creationId xmlns:a16="http://schemas.microsoft.com/office/drawing/2014/main" id="{9EEA7007-6490-402B-85C5-C24E2EAF19C5}"/>
+                <a16:creationId xmlns:a16="http://schemas.microsoft.com/office/drawing/2014/main" id="{C804D52F-B3C4-416D-BC9F-D64E5E9A50D2}"/>
               </a:ext>
             </a:extLst>
           </p:cNvPr>
@@ -3470,7 +3470,7 @@
           <p:cNvPr id="5" name="">
             <a:extLst xmlns:a="http://schemas.openxmlformats.org/drawingml/2006/main">
               <a:ext uri="{FF2B5EF4-FFF2-40B4-BE49-F238E27FC236}">
-                <a16:creationId xmlns:a16="http://schemas.microsoft.com/office/drawing/2014/main" id="{2A580A96-70DE-4F87-A776-FF418AAF14E6}"/>
+                <a16:creationId xmlns:a16="http://schemas.microsoft.com/office/drawing/2014/main" id="{A2FFD966-AA33-4157-AEAB-62069F779987}"/>
               </a:ext>
             </a:extLst>
           </p:cNvPr>
@@ -3527,7 +3527,7 @@
           <p:cNvPr id="6" name="">
             <a:extLst xmlns:a="http://schemas.openxmlformats.org/drawingml/2006/main">
               <a:ext uri="{FF2B5EF4-FFF2-40B4-BE49-F238E27FC236}">
-                <a16:creationId xmlns:a16="http://schemas.microsoft.com/office/drawing/2014/main" id="{2B4C1824-CFDF-4F0C-B5ED-288A90788910}"/>
+                <a16:creationId xmlns:a16="http://schemas.microsoft.com/office/drawing/2014/main" id="{FB3780B0-F174-49A4-A295-671BDCE9F77A}"/>
               </a:ext>
             </a:extLst>
           </p:cNvPr>
@@ -3584,7 +3584,7 @@
           <p:cNvPr id="7" name="">
             <a:extLst xmlns:a="http://schemas.openxmlformats.org/drawingml/2006/main">
               <a:ext uri="{FF2B5EF4-FFF2-40B4-BE49-F238E27FC236}">
-                <a16:creationId xmlns:a16="http://schemas.microsoft.com/office/drawing/2014/main" id="{01710EAC-3382-4D7C-B59A-3C639750B4B0}"/>
+                <a16:creationId xmlns:a16="http://schemas.microsoft.com/office/drawing/2014/main" id="{F18CFFED-CBB4-4216-B72C-832E915C1F05}"/>
               </a:ext>
             </a:extLst>
           </p:cNvPr>
@@ -3616,7 +3616,7 @@
           <p:cNvPr id="8" name="">
             <a:extLst xmlns:a="http://schemas.openxmlformats.org/drawingml/2006/main">
               <a:ext uri="{FF2B5EF4-FFF2-40B4-BE49-F238E27FC236}">
-                <a16:creationId xmlns:a16="http://schemas.microsoft.com/office/drawing/2014/main" id="{B44427DF-9ECC-4942-9991-D83D0913E731}"/>
+                <a16:creationId xmlns:a16="http://schemas.microsoft.com/office/drawing/2014/main" id="{8F35B89B-18D9-42E1-8CF9-2DD033B51C89}"/>
               </a:ext>
             </a:extLst>
           </p:cNvPr>
@@ -3673,7 +3673,7 @@
           <p:cNvPr id="9" name="">
             <a:extLst xmlns:a="http://schemas.openxmlformats.org/drawingml/2006/main">
               <a:ext uri="{FF2B5EF4-FFF2-40B4-BE49-F238E27FC236}">
-                <a16:creationId xmlns:a16="http://schemas.microsoft.com/office/drawing/2014/main" id="{A30F117E-6235-4539-8559-28E1C8934953}"/>
+                <a16:creationId xmlns:a16="http://schemas.microsoft.com/office/drawing/2014/main" id="{4EB00CD1-B248-4558-AE4C-A7FA34202192}"/>
               </a:ext>
             </a:extLst>
           </p:cNvPr>
@@ -3730,7 +3730,7 @@
           <p:cNvPr id="10" name="">
             <a:extLst xmlns:a="http://schemas.openxmlformats.org/drawingml/2006/main">
               <a:ext uri="{FF2B5EF4-FFF2-40B4-BE49-F238E27FC236}">
-                <a16:creationId xmlns:a16="http://schemas.microsoft.com/office/drawing/2014/main" id="{F0376EAB-C358-4CE3-A128-5AEBDD07B1AE}"/>
+                <a16:creationId xmlns:a16="http://schemas.microsoft.com/office/drawing/2014/main" id="{FD3314DB-98D4-4D6D-B296-C41052D4DB1A}"/>
               </a:ext>
             </a:extLst>
           </p:cNvPr>
@@ -3787,7 +3787,7 @@
           <p:cNvPr id="11" name="">
             <a:extLst xmlns:a="http://schemas.openxmlformats.org/drawingml/2006/main">
               <a:ext uri="{FF2B5EF4-FFF2-40B4-BE49-F238E27FC236}">
-                <a16:creationId xmlns:a16="http://schemas.microsoft.com/office/drawing/2014/main" id="{0C607C7A-7CD5-437D-9FF9-1A369761DBD7}"/>
+                <a16:creationId xmlns:a16="http://schemas.microsoft.com/office/drawing/2014/main" id="{FBEBFCDD-7FB1-4602-B5F0-88D4B2136798}"/>
               </a:ext>
             </a:extLst>
           </p:cNvPr>
@@ -3821,7 +3821,7 @@
           <p:cNvPr id="12" name="">
             <a:extLst xmlns:a="http://schemas.openxmlformats.org/drawingml/2006/main">
               <a:ext uri="{FF2B5EF4-FFF2-40B4-BE49-F238E27FC236}">
-                <a16:creationId xmlns:a16="http://schemas.microsoft.com/office/drawing/2014/main" id="{9432E5BF-207A-4D33-9811-D6C36B603DC7}"/>
+                <a16:creationId xmlns:a16="http://schemas.microsoft.com/office/drawing/2014/main" id="{C0204BEE-221E-4283-AD54-0B54BB2C5117}"/>
               </a:ext>
             </a:extLst>
           </p:cNvPr>
@@ -3878,7 +3878,7 @@
           <p:cNvPr id="13" name="">
             <a:extLst xmlns:a="http://schemas.openxmlformats.org/drawingml/2006/main">
               <a:ext uri="{FF2B5EF4-FFF2-40B4-BE49-F238E27FC236}">
-                <a16:creationId xmlns:a16="http://schemas.microsoft.com/office/drawing/2014/main" id="{CB238AB4-9675-409B-9A78-B979E3DBD335}"/>
+                <a16:creationId xmlns:a16="http://schemas.microsoft.com/office/drawing/2014/main" id="{8FCD9906-D425-4777-9F95-811B968BC88D}"/>
               </a:ext>
             </a:extLst>
           </p:cNvPr>
@@ -3935,7 +3935,7 @@
           <p:cNvPr id="14" name="">
             <a:extLst xmlns:a="http://schemas.openxmlformats.org/drawingml/2006/main">
               <a:ext uri="{FF2B5EF4-FFF2-40B4-BE49-F238E27FC236}">
-                <a16:creationId xmlns:a16="http://schemas.microsoft.com/office/drawing/2014/main" id="{8D3A344B-891C-4319-AE37-C4FB924E8058}"/>
+                <a16:creationId xmlns:a16="http://schemas.microsoft.com/office/drawing/2014/main" id="{7323442D-CB95-4A6F-BF6B-E29DE4F99252}"/>
               </a:ext>
             </a:extLst>
           </p:cNvPr>
@@ -3992,7 +3992,7 @@
           <p:cNvPr id="15" name="">
             <a:extLst xmlns:a="http://schemas.openxmlformats.org/drawingml/2006/main">
               <a:ext uri="{FF2B5EF4-FFF2-40B4-BE49-F238E27FC236}">
-                <a16:creationId xmlns:a16="http://schemas.microsoft.com/office/drawing/2014/main" id="{E497654C-F576-4F61-BDE0-F32767D3024F}"/>
+                <a16:creationId xmlns:a16="http://schemas.microsoft.com/office/drawing/2014/main" id="{BCFEF286-0ADB-49E1-BEDC-8C7EA7B9BD17}"/>
               </a:ext>
             </a:extLst>
           </p:cNvPr>
@@ -4026,7 +4026,7 @@
           <p:cNvPr id="16" name="">
             <a:extLst xmlns:a="http://schemas.openxmlformats.org/drawingml/2006/main">
               <a:ext uri="{FF2B5EF4-FFF2-40B4-BE49-F238E27FC236}">
-                <a16:creationId xmlns:a16="http://schemas.microsoft.com/office/drawing/2014/main" id="{05D23452-E056-4148-8D84-4D343BC1D78E}"/>
+                <a16:creationId xmlns:a16="http://schemas.microsoft.com/office/drawing/2014/main" id="{D3E0209D-19C5-4762-8DF1-2B1F90546502}"/>
               </a:ext>
             </a:extLst>
           </p:cNvPr>
@@ -4083,7 +4083,7 @@
           <p:cNvPr id="17" name="">
             <a:extLst xmlns:a="http://schemas.openxmlformats.org/drawingml/2006/main">
               <a:ext uri="{FF2B5EF4-FFF2-40B4-BE49-F238E27FC236}">
-                <a16:creationId xmlns:a16="http://schemas.microsoft.com/office/drawing/2014/main" id="{16D79E52-4F42-48F6-BB28-7A180E40E4A4}"/>
+                <a16:creationId xmlns:a16="http://schemas.microsoft.com/office/drawing/2014/main" id="{90B8622A-7EB0-43E1-97B4-9ADA795AD7E2}"/>
               </a:ext>
             </a:extLst>
           </p:cNvPr>
@@ -4140,7 +4140,7 @@
           <p:cNvPr id="18" name="">
             <a:extLst xmlns:a="http://schemas.openxmlformats.org/drawingml/2006/main">
               <a:ext uri="{FF2B5EF4-FFF2-40B4-BE49-F238E27FC236}">
-                <a16:creationId xmlns:a16="http://schemas.microsoft.com/office/drawing/2014/main" id="{8276C3AA-32CC-4F93-A3FF-4E076BA7EE5E}"/>
+                <a16:creationId xmlns:a16="http://schemas.microsoft.com/office/drawing/2014/main" id="{663B3E9E-6CF4-4404-91A3-E65F299F2641}"/>
               </a:ext>
             </a:extLst>
           </p:cNvPr>
@@ -4195,7 +4195,7 @@
     </p:spTree>
     <p:extLst>
       <p:ext uri="{BB962C8B-B14F-4D97-AF65-F5344CB8AC3E}">
-        <p14:creationId xmlns:p14="http://schemas.microsoft.com/office/powerpoint/2010/main" val="1744629089"/>
+        <p14:creationId xmlns:p14="http://schemas.microsoft.com/office/powerpoint/2010/main" val="1156750661"/>
       </p:ext>
     </p:extLst>
   </p:cSld>
@@ -4350,7 +4350,7 @@
           <p:cNvPr id="23" name="">
             <a:extLst xmlns:a="http://schemas.openxmlformats.org/drawingml/2006/main">
               <a:ext uri="{FF2B5EF4-FFF2-40B4-BE49-F238E27FC236}">
-                <a16:creationId xmlns:a16="http://schemas.microsoft.com/office/drawing/2014/main" id="{11ABB3AF-698F-4B65-B6AF-27018C6305AA}"/>
+                <a16:creationId xmlns:a16="http://schemas.microsoft.com/office/drawing/2014/main" id="{A085B790-D33F-4BCB-827A-F905D0DE5DCF}"/>
               </a:ext>
             </a:extLst>
           </p:cNvPr>
@@ -4382,7 +4382,7 @@
           <p:cNvPr id="2" name="">
             <a:extLst xmlns:a="http://schemas.openxmlformats.org/drawingml/2006/main">
               <a:ext uri="{FF2B5EF4-FFF2-40B4-BE49-F238E27FC236}">
-                <a16:creationId xmlns:a16="http://schemas.microsoft.com/office/drawing/2014/main" id="{3F9DDB15-531E-45AD-A01F-84A58EC59A73}"/>
+                <a16:creationId xmlns:a16="http://schemas.microsoft.com/office/drawing/2014/main" id="{C327D427-4780-4D6D-9F4C-57E81A94E288}"/>
               </a:ext>
             </a:extLst>
           </p:cNvPr>
@@ -4439,7 +4439,7 @@
           <p:cNvPr id="3" name="">
             <a:extLst xmlns:a="http://schemas.openxmlformats.org/drawingml/2006/main">
               <a:ext uri="{FF2B5EF4-FFF2-40B4-BE49-F238E27FC236}">
-                <a16:creationId xmlns:a16="http://schemas.microsoft.com/office/drawing/2014/main" id="{CB5006E4-E707-48CD-A185-AA3387468EA1}"/>
+                <a16:creationId xmlns:a16="http://schemas.microsoft.com/office/drawing/2014/main" id="{2F2F3DE7-DC55-45B5-BA3D-5222977D497B}"/>
               </a:ext>
             </a:extLst>
           </p:cNvPr>
@@ -4471,7 +4471,7 @@
           <p:cNvPr id="4" name="">
             <a:extLst xmlns:a="http://schemas.openxmlformats.org/drawingml/2006/main">
               <a:ext uri="{FF2B5EF4-FFF2-40B4-BE49-F238E27FC236}">
-                <a16:creationId xmlns:a16="http://schemas.microsoft.com/office/drawing/2014/main" id="{135D60AC-A3BC-41C7-8196-656C3DD10589}"/>
+                <a16:creationId xmlns:a16="http://schemas.microsoft.com/office/drawing/2014/main" id="{9E1FDD04-5D2A-4401-8F18-F9D84A941EDF}"/>
               </a:ext>
             </a:extLst>
           </p:cNvPr>
@@ -4528,7 +4528,7 @@
           <p:cNvPr id="5" name="">
             <a:extLst xmlns:a="http://schemas.openxmlformats.org/drawingml/2006/main">
               <a:ext uri="{FF2B5EF4-FFF2-40B4-BE49-F238E27FC236}">
-                <a16:creationId xmlns:a16="http://schemas.microsoft.com/office/drawing/2014/main" id="{ED08D39A-2CE2-4D74-9DDF-0AA52D5CBE36}"/>
+                <a16:creationId xmlns:a16="http://schemas.microsoft.com/office/drawing/2014/main" id="{DD686416-8BEC-4078-B60E-B147E72B742C}"/>
               </a:ext>
             </a:extLst>
           </p:cNvPr>
@@ -4585,7 +4585,7 @@
           <p:cNvPr id="6" name="">
             <a:extLst xmlns:a="http://schemas.openxmlformats.org/drawingml/2006/main">
               <a:ext uri="{FF2B5EF4-FFF2-40B4-BE49-F238E27FC236}">
-                <a16:creationId xmlns:a16="http://schemas.microsoft.com/office/drawing/2014/main" id="{3594F425-2777-4A94-906E-0C48CF2C0447}"/>
+                <a16:creationId xmlns:a16="http://schemas.microsoft.com/office/drawing/2014/main" id="{AADE6113-F583-4319-AB25-DC649939AD54}"/>
               </a:ext>
             </a:extLst>
           </p:cNvPr>
@@ -4642,7 +4642,7 @@
           <p:cNvPr id="7" name="">
             <a:extLst xmlns:a="http://schemas.openxmlformats.org/drawingml/2006/main">
               <a:ext uri="{FF2B5EF4-FFF2-40B4-BE49-F238E27FC236}">
-                <a16:creationId xmlns:a16="http://schemas.microsoft.com/office/drawing/2014/main" id="{DC878BA6-96A2-4D7B-8651-C2B04E132031}"/>
+                <a16:creationId xmlns:a16="http://schemas.microsoft.com/office/drawing/2014/main" id="{8B98F3D1-73E2-41E3-A758-FE719706A52D}"/>
               </a:ext>
             </a:extLst>
           </p:cNvPr>
@@ -4674,7 +4674,7 @@
           <p:cNvPr id="8" name="">
             <a:extLst xmlns:a="http://schemas.openxmlformats.org/drawingml/2006/main">
               <a:ext uri="{FF2B5EF4-FFF2-40B4-BE49-F238E27FC236}">
-                <a16:creationId xmlns:a16="http://schemas.microsoft.com/office/drawing/2014/main" id="{4C1DF271-F91F-4551-B6D8-A2169DA63B32}"/>
+                <a16:creationId xmlns:a16="http://schemas.microsoft.com/office/drawing/2014/main" id="{21712C47-93BB-4BD2-B027-354C25902808}"/>
               </a:ext>
             </a:extLst>
           </p:cNvPr>
@@ -4731,7 +4731,7 @@
           <p:cNvPr id="9" name="">
             <a:extLst xmlns:a="http://schemas.openxmlformats.org/drawingml/2006/main">
               <a:ext uri="{FF2B5EF4-FFF2-40B4-BE49-F238E27FC236}">
-                <a16:creationId xmlns:a16="http://schemas.microsoft.com/office/drawing/2014/main" id="{81D32CF6-7171-4BFC-95A2-4188DC3C625D}"/>
+                <a16:creationId xmlns:a16="http://schemas.microsoft.com/office/drawing/2014/main" id="{DB05E75F-53C6-4A88-96A6-271205D7DBCF}"/>
               </a:ext>
             </a:extLst>
           </p:cNvPr>
@@ -4788,7 +4788,7 @@
           <p:cNvPr id="10" name="">
             <a:extLst xmlns:a="http://schemas.openxmlformats.org/drawingml/2006/main">
               <a:ext uri="{FF2B5EF4-FFF2-40B4-BE49-F238E27FC236}">
-                <a16:creationId xmlns:a16="http://schemas.microsoft.com/office/drawing/2014/main" id="{458A1161-E3C3-4021-8D2D-F15A1D18BF46}"/>
+                <a16:creationId xmlns:a16="http://schemas.microsoft.com/office/drawing/2014/main" id="{6042C3A0-2078-4F99-8E53-B92A9ADB745F}"/>
               </a:ext>
             </a:extLst>
           </p:cNvPr>
@@ -4822,7 +4822,7 @@
           <p:cNvPr id="11" name="">
             <a:extLst xmlns:a="http://schemas.openxmlformats.org/drawingml/2006/main">
               <a:ext uri="{FF2B5EF4-FFF2-40B4-BE49-F238E27FC236}">
-                <a16:creationId xmlns:a16="http://schemas.microsoft.com/office/drawing/2014/main" id="{712EC61E-A794-4289-BF89-B3E32700B7C5}"/>
+                <a16:creationId xmlns:a16="http://schemas.microsoft.com/office/drawing/2014/main" id="{A9DF2C25-0FA8-4017-996A-77BEB52BB65E}"/>
               </a:ext>
             </a:extLst>
           </p:cNvPr>
@@ -4854,7 +4854,7 @@
           <p:cNvPr id="12" name="">
             <a:extLst xmlns:a="http://schemas.openxmlformats.org/drawingml/2006/main">
               <a:ext uri="{FF2B5EF4-FFF2-40B4-BE49-F238E27FC236}">
-                <a16:creationId xmlns:a16="http://schemas.microsoft.com/office/drawing/2014/main" id="{A66F9A92-3941-421F-881D-E2CDC2CDB345}"/>
+                <a16:creationId xmlns:a16="http://schemas.microsoft.com/office/drawing/2014/main" id="{5E79C980-850B-4EC8-82EB-5818F298C5B8}"/>
               </a:ext>
             </a:extLst>
           </p:cNvPr>
@@ -4911,7 +4911,7 @@
           <p:cNvPr id="13" name="">
             <a:extLst xmlns:a="http://schemas.openxmlformats.org/drawingml/2006/main">
               <a:ext uri="{FF2B5EF4-FFF2-40B4-BE49-F238E27FC236}">
-                <a16:creationId xmlns:a16="http://schemas.microsoft.com/office/drawing/2014/main" id="{79ED349A-588B-4B3C-B36B-BD22F92E8721}"/>
+                <a16:creationId xmlns:a16="http://schemas.microsoft.com/office/drawing/2014/main" id="{A98C9A6D-AB3D-4B0F-B0F5-1BA92DE0241A}"/>
               </a:ext>
             </a:extLst>
           </p:cNvPr>
@@ -4968,7 +4968,7 @@
           <p:cNvPr id="14" name="">
             <a:extLst xmlns:a="http://schemas.openxmlformats.org/drawingml/2006/main">
               <a:ext uri="{FF2B5EF4-FFF2-40B4-BE49-F238E27FC236}">
-                <a16:creationId xmlns:a16="http://schemas.microsoft.com/office/drawing/2014/main" id="{F9DB0452-0902-48C7-8B7E-BEB71F3D335C}"/>
+                <a16:creationId xmlns:a16="http://schemas.microsoft.com/office/drawing/2014/main" id="{634046EC-06CA-4285-9315-8D240F7EECA0}"/>
               </a:ext>
             </a:extLst>
           </p:cNvPr>
@@ -5002,7 +5002,7 @@
           <p:cNvPr id="15" name="">
             <a:extLst xmlns:a="http://schemas.openxmlformats.org/drawingml/2006/main">
               <a:ext uri="{FF2B5EF4-FFF2-40B4-BE49-F238E27FC236}">
-                <a16:creationId xmlns:a16="http://schemas.microsoft.com/office/drawing/2014/main" id="{C510D48D-6587-4F5A-BE36-430F73A44E42}"/>
+                <a16:creationId xmlns:a16="http://schemas.microsoft.com/office/drawing/2014/main" id="{F4A7A736-FEAF-408A-9D3F-D84F3FDB0205}"/>
               </a:ext>
             </a:extLst>
           </p:cNvPr>
@@ -5034,7 +5034,7 @@
           <p:cNvPr id="16" name="">
             <a:extLst xmlns:a="http://schemas.openxmlformats.org/drawingml/2006/main">
               <a:ext uri="{FF2B5EF4-FFF2-40B4-BE49-F238E27FC236}">
-                <a16:creationId xmlns:a16="http://schemas.microsoft.com/office/drawing/2014/main" id="{51F534E4-8DBA-4763-B19A-C1C818C95669}"/>
+                <a16:creationId xmlns:a16="http://schemas.microsoft.com/office/drawing/2014/main" id="{07A8739A-6209-4BC9-B37F-4A60850AA397}"/>
               </a:ext>
             </a:extLst>
           </p:cNvPr>
@@ -5091,7 +5091,7 @@
           <p:cNvPr id="17" name="">
             <a:extLst xmlns:a="http://schemas.openxmlformats.org/drawingml/2006/main">
               <a:ext uri="{FF2B5EF4-FFF2-40B4-BE49-F238E27FC236}">
-                <a16:creationId xmlns:a16="http://schemas.microsoft.com/office/drawing/2014/main" id="{E522D328-C81F-492E-BF01-8DA5FF67FF45}"/>
+                <a16:creationId xmlns:a16="http://schemas.microsoft.com/office/drawing/2014/main" id="{E9C98A8F-0486-4151-9D98-AC7C7DC1C32F}"/>
               </a:ext>
             </a:extLst>
           </p:cNvPr>
@@ -5148,7 +5148,7 @@
           <p:cNvPr id="18" name="">
             <a:extLst xmlns:a="http://schemas.openxmlformats.org/drawingml/2006/main">
               <a:ext uri="{FF2B5EF4-FFF2-40B4-BE49-F238E27FC236}">
-                <a16:creationId xmlns:a16="http://schemas.microsoft.com/office/drawing/2014/main" id="{445379D9-E41C-41CA-9D75-C2076AB7753B}"/>
+                <a16:creationId xmlns:a16="http://schemas.microsoft.com/office/drawing/2014/main" id="{EB621116-54B7-4CCB-B55A-CEE6C4D770ED}"/>
               </a:ext>
             </a:extLst>
           </p:cNvPr>
@@ -5182,7 +5182,7 @@
           <p:cNvPr id="19" name="">
             <a:extLst xmlns:a="http://schemas.openxmlformats.org/drawingml/2006/main">
               <a:ext uri="{FF2B5EF4-FFF2-40B4-BE49-F238E27FC236}">
-                <a16:creationId xmlns:a16="http://schemas.microsoft.com/office/drawing/2014/main" id="{0FA5EF80-D257-46FE-9928-1292DDD20118}"/>
+                <a16:creationId xmlns:a16="http://schemas.microsoft.com/office/drawing/2014/main" id="{CA6A504F-E087-49BA-89BB-EAD152850A1B}"/>
               </a:ext>
             </a:extLst>
           </p:cNvPr>
@@ -5214,7 +5214,7 @@
           <p:cNvPr id="20" name="">
             <a:extLst xmlns:a="http://schemas.openxmlformats.org/drawingml/2006/main">
               <a:ext uri="{FF2B5EF4-FFF2-40B4-BE49-F238E27FC236}">
-                <a16:creationId xmlns:a16="http://schemas.microsoft.com/office/drawing/2014/main" id="{82FBC8A8-051C-44D7-9942-4FF4240239DF}"/>
+                <a16:creationId xmlns:a16="http://schemas.microsoft.com/office/drawing/2014/main" id="{5C1A35DC-64BB-4A46-91D5-9B3A93AA3B13}"/>
               </a:ext>
             </a:extLst>
           </p:cNvPr>
@@ -5271,7 +5271,7 @@
           <p:cNvPr id="21" name="">
             <a:extLst xmlns:a="http://schemas.openxmlformats.org/drawingml/2006/main">
               <a:ext uri="{FF2B5EF4-FFF2-40B4-BE49-F238E27FC236}">
-                <a16:creationId xmlns:a16="http://schemas.microsoft.com/office/drawing/2014/main" id="{6B8C403E-E084-4254-97CD-536E2347AA4F}"/>
+                <a16:creationId xmlns:a16="http://schemas.microsoft.com/office/drawing/2014/main" id="{CB152958-F266-4757-B95E-F58ECDA09679}"/>
               </a:ext>
             </a:extLst>
           </p:cNvPr>
@@ -5328,7 +5328,7 @@
           <p:cNvPr id="22" name="">
             <a:extLst xmlns:a="http://schemas.openxmlformats.org/drawingml/2006/main">
               <a:ext uri="{FF2B5EF4-FFF2-40B4-BE49-F238E27FC236}">
-                <a16:creationId xmlns:a16="http://schemas.microsoft.com/office/drawing/2014/main" id="{6CA28733-CC0F-4F71-A64A-235520FE3118}"/>
+                <a16:creationId xmlns:a16="http://schemas.microsoft.com/office/drawing/2014/main" id="{96DA8B03-61D2-4AE8-B68C-1BB3DD24C629}"/>
               </a:ext>
             </a:extLst>
           </p:cNvPr>
@@ -5383,7 +5383,7 @@
     </p:spTree>
     <p:extLst>
       <p:ext uri="{BB962C8B-B14F-4D97-AF65-F5344CB8AC3E}">
-        <p14:creationId xmlns:p14="http://schemas.microsoft.com/office/powerpoint/2010/main" val="271083376"/>
+        <p14:creationId xmlns:p14="http://schemas.microsoft.com/office/powerpoint/2010/main" val="1464689604"/>
       </p:ext>
     </p:extLst>
   </p:cSld>
@@ -5584,7 +5584,7 @@
           <p:cNvPr id="23" name="">
             <a:extLst xmlns:a="http://schemas.openxmlformats.org/drawingml/2006/main">
               <a:ext uri="{FF2B5EF4-FFF2-40B4-BE49-F238E27FC236}">
-                <a16:creationId xmlns:a16="http://schemas.microsoft.com/office/drawing/2014/main" id="{EE75EFE5-EC10-49DB-900A-CF158825699E}"/>
+                <a16:creationId xmlns:a16="http://schemas.microsoft.com/office/drawing/2014/main" id="{DE8F2FE1-7092-4C49-864B-F9646291F272}"/>
               </a:ext>
             </a:extLst>
           </p:cNvPr>
@@ -5616,7 +5616,7 @@
           <p:cNvPr id="2" name="">
             <a:extLst xmlns:a="http://schemas.openxmlformats.org/drawingml/2006/main">
               <a:ext uri="{FF2B5EF4-FFF2-40B4-BE49-F238E27FC236}">
-                <a16:creationId xmlns:a16="http://schemas.microsoft.com/office/drawing/2014/main" id="{FC4095DC-7DDF-4A80-A6F1-9F8FE44E0D52}"/>
+                <a16:creationId xmlns:a16="http://schemas.microsoft.com/office/drawing/2014/main" id="{926A49AB-5059-49FD-8A01-597E57A86978}"/>
               </a:ext>
             </a:extLst>
           </p:cNvPr>
@@ -5673,7 +5673,7 @@
           <p:cNvPr id="3" name="">
             <a:extLst xmlns:a="http://schemas.openxmlformats.org/drawingml/2006/main">
               <a:ext uri="{FF2B5EF4-FFF2-40B4-BE49-F238E27FC236}">
-                <a16:creationId xmlns:a16="http://schemas.microsoft.com/office/drawing/2014/main" id="{2C55F1B2-30D9-4BE3-9669-A563F2533A9E}"/>
+                <a16:creationId xmlns:a16="http://schemas.microsoft.com/office/drawing/2014/main" id="{4CEA617A-6080-4056-97C5-4E9393212764}"/>
               </a:ext>
             </a:extLst>
           </p:cNvPr>
@@ -5705,7 +5705,7 @@
           <p:cNvPr id="4" name="">
             <a:extLst xmlns:a="http://schemas.openxmlformats.org/drawingml/2006/main">
               <a:ext uri="{FF2B5EF4-FFF2-40B4-BE49-F238E27FC236}">
-                <a16:creationId xmlns:a16="http://schemas.microsoft.com/office/drawing/2014/main" id="{529D6404-13E0-48EC-A5EF-312D850C1CD9}"/>
+                <a16:creationId xmlns:a16="http://schemas.microsoft.com/office/drawing/2014/main" id="{0D09F340-589D-445E-8530-7E0A4B882400}"/>
               </a:ext>
             </a:extLst>
           </p:cNvPr>
@@ -5762,7 +5762,7 @@
           <p:cNvPr id="5" name="">
             <a:extLst xmlns:a="http://schemas.openxmlformats.org/drawingml/2006/main">
               <a:ext uri="{FF2B5EF4-FFF2-40B4-BE49-F238E27FC236}">
-                <a16:creationId xmlns:a16="http://schemas.microsoft.com/office/drawing/2014/main" id="{1A32C9DC-86F6-4F47-8799-2DD955CEE8E3}"/>
+                <a16:creationId xmlns:a16="http://schemas.microsoft.com/office/drawing/2014/main" id="{7C91F5AB-2439-4125-97CC-B2A341B2731C}"/>
               </a:ext>
             </a:extLst>
           </p:cNvPr>
@@ -5819,7 +5819,7 @@
           <p:cNvPr id="6" name="">
             <a:extLst xmlns:a="http://schemas.openxmlformats.org/drawingml/2006/main">
               <a:ext uri="{FF2B5EF4-FFF2-40B4-BE49-F238E27FC236}">
-                <a16:creationId xmlns:a16="http://schemas.microsoft.com/office/drawing/2014/main" id="{A68BEE3B-C4B2-4D8A-8C54-61A892A38F0E}"/>
+                <a16:creationId xmlns:a16="http://schemas.microsoft.com/office/drawing/2014/main" id="{75204DEE-909B-46BB-995B-78E6C549DA28}"/>
               </a:ext>
             </a:extLst>
           </p:cNvPr>
@@ -5876,7 +5876,7 @@
           <p:cNvPr id="7" name="">
             <a:extLst xmlns:a="http://schemas.openxmlformats.org/drawingml/2006/main">
               <a:ext uri="{FF2B5EF4-FFF2-40B4-BE49-F238E27FC236}">
-                <a16:creationId xmlns:a16="http://schemas.microsoft.com/office/drawing/2014/main" id="{0D796A67-547A-4074-B503-099238D994DA}"/>
+                <a16:creationId xmlns:a16="http://schemas.microsoft.com/office/drawing/2014/main" id="{9177C48A-B4D2-4AAB-AADA-31235F1C7C08}"/>
               </a:ext>
             </a:extLst>
           </p:cNvPr>
@@ -5908,7 +5908,7 @@
           <p:cNvPr id="8" name="">
             <a:extLst xmlns:a="http://schemas.openxmlformats.org/drawingml/2006/main">
               <a:ext uri="{FF2B5EF4-FFF2-40B4-BE49-F238E27FC236}">
-                <a16:creationId xmlns:a16="http://schemas.microsoft.com/office/drawing/2014/main" id="{C036BCA4-F952-4D4F-B197-4A078FCF9B77}"/>
+                <a16:creationId xmlns:a16="http://schemas.microsoft.com/office/drawing/2014/main" id="{2866D89D-6FE0-4400-808C-E87B61CA4850}"/>
               </a:ext>
             </a:extLst>
           </p:cNvPr>
@@ -5965,7 +5965,7 @@
           <p:cNvPr id="9" name="">
             <a:extLst xmlns:a="http://schemas.openxmlformats.org/drawingml/2006/main">
               <a:ext uri="{FF2B5EF4-FFF2-40B4-BE49-F238E27FC236}">
-                <a16:creationId xmlns:a16="http://schemas.microsoft.com/office/drawing/2014/main" id="{26DD80BB-9BAD-4B0C-ADD5-85C25F22E56A}"/>
+                <a16:creationId xmlns:a16="http://schemas.microsoft.com/office/drawing/2014/main" id="{B48D2A46-2081-4565-B1ED-27ABEB20A77F}"/>
               </a:ext>
             </a:extLst>
           </p:cNvPr>
@@ -6022,7 +6022,7 @@
           <p:cNvPr id="10" name="">
             <a:extLst xmlns:a="http://schemas.openxmlformats.org/drawingml/2006/main">
               <a:ext uri="{FF2B5EF4-FFF2-40B4-BE49-F238E27FC236}">
-                <a16:creationId xmlns:a16="http://schemas.microsoft.com/office/drawing/2014/main" id="{FBC9481D-3CB6-4ECF-A2FE-BC98CD0BB384}"/>
+                <a16:creationId xmlns:a16="http://schemas.microsoft.com/office/drawing/2014/main" id="{C614B799-52B7-4A75-8FFA-0E20DEC32CD8}"/>
               </a:ext>
             </a:extLst>
           </p:cNvPr>
@@ -6056,7 +6056,7 @@
           <p:cNvPr id="11" name="">
             <a:extLst xmlns:a="http://schemas.openxmlformats.org/drawingml/2006/main">
               <a:ext uri="{FF2B5EF4-FFF2-40B4-BE49-F238E27FC236}">
-                <a16:creationId xmlns:a16="http://schemas.microsoft.com/office/drawing/2014/main" id="{45BAC1C2-0F0F-49B6-B737-75CB301D402C}"/>
+                <a16:creationId xmlns:a16="http://schemas.microsoft.com/office/drawing/2014/main" id="{ECA038DE-9205-49BD-9846-BFDDE2AD77C5}"/>
               </a:ext>
             </a:extLst>
           </p:cNvPr>
@@ -6088,7 +6088,7 @@
           <p:cNvPr id="12" name="">
             <a:extLst xmlns:a="http://schemas.openxmlformats.org/drawingml/2006/main">
               <a:ext uri="{FF2B5EF4-FFF2-40B4-BE49-F238E27FC236}">
-                <a16:creationId xmlns:a16="http://schemas.microsoft.com/office/drawing/2014/main" id="{8FE5EB86-18ED-46CC-9C83-235FF7B248BD}"/>
+                <a16:creationId xmlns:a16="http://schemas.microsoft.com/office/drawing/2014/main" id="{60F77A16-66A4-4C1A-8681-5AB591EC180D}"/>
               </a:ext>
             </a:extLst>
           </p:cNvPr>
@@ -6145,7 +6145,7 @@
           <p:cNvPr id="13" name="">
             <a:extLst xmlns:a="http://schemas.openxmlformats.org/drawingml/2006/main">
               <a:ext uri="{FF2B5EF4-FFF2-40B4-BE49-F238E27FC236}">
-                <a16:creationId xmlns:a16="http://schemas.microsoft.com/office/drawing/2014/main" id="{6F66C963-E1C5-4E31-AD01-34A4E418E181}"/>
+                <a16:creationId xmlns:a16="http://schemas.microsoft.com/office/drawing/2014/main" id="{5FAE5F4F-3BCC-47B8-BBB0-5315E532D1BA}"/>
               </a:ext>
             </a:extLst>
           </p:cNvPr>
@@ -6202,7 +6202,7 @@
           <p:cNvPr id="14" name="">
             <a:extLst xmlns:a="http://schemas.openxmlformats.org/drawingml/2006/main">
               <a:ext uri="{FF2B5EF4-FFF2-40B4-BE49-F238E27FC236}">
-                <a16:creationId xmlns:a16="http://schemas.microsoft.com/office/drawing/2014/main" id="{41BAF350-869A-432C-B32C-8F9E50E65FFF}"/>
+                <a16:creationId xmlns:a16="http://schemas.microsoft.com/office/drawing/2014/main" id="{928BBAF5-4216-43CE-B9AA-B6630CF63E5E}"/>
               </a:ext>
             </a:extLst>
           </p:cNvPr>
@@ -6236,7 +6236,7 @@
           <p:cNvPr id="15" name="">
             <a:extLst xmlns:a="http://schemas.openxmlformats.org/drawingml/2006/main">
               <a:ext uri="{FF2B5EF4-FFF2-40B4-BE49-F238E27FC236}">
-                <a16:creationId xmlns:a16="http://schemas.microsoft.com/office/drawing/2014/main" id="{3848B371-E5AD-430C-B78A-09A8D21C9EE6}"/>
+                <a16:creationId xmlns:a16="http://schemas.microsoft.com/office/drawing/2014/main" id="{40DE259D-1CA3-4806-ADB4-2A88B36FBDE6}"/>
               </a:ext>
             </a:extLst>
           </p:cNvPr>
@@ -6268,7 +6268,7 @@
           <p:cNvPr id="16" name="">
             <a:extLst xmlns:a="http://schemas.openxmlformats.org/drawingml/2006/main">
               <a:ext uri="{FF2B5EF4-FFF2-40B4-BE49-F238E27FC236}">
-                <a16:creationId xmlns:a16="http://schemas.microsoft.com/office/drawing/2014/main" id="{ED45B1C5-6DCC-44F5-A00F-D14BBF803E13}"/>
+                <a16:creationId xmlns:a16="http://schemas.microsoft.com/office/drawing/2014/main" id="{B326E674-0417-4184-B612-3B3771380067}"/>
               </a:ext>
             </a:extLst>
           </p:cNvPr>
@@ -6325,7 +6325,7 @@
           <p:cNvPr id="17" name="">
             <a:extLst xmlns:a="http://schemas.openxmlformats.org/drawingml/2006/main">
               <a:ext uri="{FF2B5EF4-FFF2-40B4-BE49-F238E27FC236}">
-                <a16:creationId xmlns:a16="http://schemas.microsoft.com/office/drawing/2014/main" id="{247F9350-4C58-459D-ABFC-C280DB1ED847}"/>
+                <a16:creationId xmlns:a16="http://schemas.microsoft.com/office/drawing/2014/main" id="{D14EF35F-BA97-4C3A-8520-E8E20EA1D373}"/>
               </a:ext>
             </a:extLst>
           </p:cNvPr>
@@ -6382,7 +6382,7 @@
           <p:cNvPr id="18" name="">
             <a:extLst xmlns:a="http://schemas.openxmlformats.org/drawingml/2006/main">
               <a:ext uri="{FF2B5EF4-FFF2-40B4-BE49-F238E27FC236}">
-                <a16:creationId xmlns:a16="http://schemas.microsoft.com/office/drawing/2014/main" id="{C8CAF6D3-3338-49A4-B2A2-D403FEA2D25B}"/>
+                <a16:creationId xmlns:a16="http://schemas.microsoft.com/office/drawing/2014/main" id="{739696AC-F312-4D83-AB66-E6EC0B2A91F0}"/>
               </a:ext>
             </a:extLst>
           </p:cNvPr>
@@ -6416,7 +6416,7 @@
           <p:cNvPr id="19" name="">
             <a:extLst xmlns:a="http://schemas.openxmlformats.org/drawingml/2006/main">
               <a:ext uri="{FF2B5EF4-FFF2-40B4-BE49-F238E27FC236}">
-                <a16:creationId xmlns:a16="http://schemas.microsoft.com/office/drawing/2014/main" id="{83FDE6BC-C4AD-4922-82A3-1801E831CD55}"/>
+                <a16:creationId xmlns:a16="http://schemas.microsoft.com/office/drawing/2014/main" id="{C1C3151E-3FB9-40F6-B063-472C00105D3C}"/>
               </a:ext>
             </a:extLst>
           </p:cNvPr>
@@ -6448,7 +6448,7 @@
           <p:cNvPr id="20" name="">
             <a:extLst xmlns:a="http://schemas.openxmlformats.org/drawingml/2006/main">
               <a:ext uri="{FF2B5EF4-FFF2-40B4-BE49-F238E27FC236}">
-                <a16:creationId xmlns:a16="http://schemas.microsoft.com/office/drawing/2014/main" id="{462C4BA1-CB79-47F1-97D0-C9EAA60FCAB8}"/>
+                <a16:creationId xmlns:a16="http://schemas.microsoft.com/office/drawing/2014/main" id="{D95BF4BC-8F58-440D-AF1D-10B49EE872C9}"/>
               </a:ext>
             </a:extLst>
           </p:cNvPr>
@@ -6505,7 +6505,7 @@
           <p:cNvPr id="21" name="">
             <a:extLst xmlns:a="http://schemas.openxmlformats.org/drawingml/2006/main">
               <a:ext uri="{FF2B5EF4-FFF2-40B4-BE49-F238E27FC236}">
-                <a16:creationId xmlns:a16="http://schemas.microsoft.com/office/drawing/2014/main" id="{763FB992-4415-4C0B-91E6-CC46B2681C58}"/>
+                <a16:creationId xmlns:a16="http://schemas.microsoft.com/office/drawing/2014/main" id="{D42E1DAD-4462-45BA-93A1-7A4F7A7722F8}"/>
               </a:ext>
             </a:extLst>
           </p:cNvPr>
@@ -6562,7 +6562,7 @@
           <p:cNvPr id="22" name="">
             <a:extLst xmlns:a="http://schemas.openxmlformats.org/drawingml/2006/main">
               <a:ext uri="{FF2B5EF4-FFF2-40B4-BE49-F238E27FC236}">
-                <a16:creationId xmlns:a16="http://schemas.microsoft.com/office/drawing/2014/main" id="{A0742AF7-5233-41B2-AF56-D59B1894865A}"/>
+                <a16:creationId xmlns:a16="http://schemas.microsoft.com/office/drawing/2014/main" id="{4A7288DF-998C-4200-B477-79E0E2FD1726}"/>
               </a:ext>
             </a:extLst>
           </p:cNvPr>
@@ -6617,7 +6617,7 @@
     </p:spTree>
     <p:extLst>
       <p:ext uri="{BB962C8B-B14F-4D97-AF65-F5344CB8AC3E}">
-        <p14:creationId xmlns:p14="http://schemas.microsoft.com/office/powerpoint/2010/main" val="1735178875"/>
+        <p14:creationId xmlns:p14="http://schemas.microsoft.com/office/powerpoint/2010/main" val="84143959"/>
       </p:ext>
     </p:extLst>
   </p:cSld>
@@ -6818,7 +6818,7 @@
           <p:cNvPr id="16" name="">
             <a:extLst xmlns:a="http://schemas.openxmlformats.org/drawingml/2006/main">
               <a:ext uri="{FF2B5EF4-FFF2-40B4-BE49-F238E27FC236}">
-                <a16:creationId xmlns:a16="http://schemas.microsoft.com/office/drawing/2014/main" id="{38742FE7-ED43-40FE-A2AF-A4C263BBBD3E}"/>
+                <a16:creationId xmlns:a16="http://schemas.microsoft.com/office/drawing/2014/main" id="{AD2DFF59-0262-4C21-A1D7-31B265AF21B5}"/>
               </a:ext>
             </a:extLst>
           </p:cNvPr>
@@ -6850,7 +6850,7 @@
           <p:cNvPr id="2" name="">
             <a:extLst xmlns:a="http://schemas.openxmlformats.org/drawingml/2006/main">
               <a:ext uri="{FF2B5EF4-FFF2-40B4-BE49-F238E27FC236}">
-                <a16:creationId xmlns:a16="http://schemas.microsoft.com/office/drawing/2014/main" id="{D30D8C0C-EBF8-41E2-86B9-3DFAE94E4247}"/>
+                <a16:creationId xmlns:a16="http://schemas.microsoft.com/office/drawing/2014/main" id="{A8BE1E56-22B6-457F-B09D-D2B22DD22F19}"/>
               </a:ext>
             </a:extLst>
           </p:cNvPr>
@@ -6907,7 +6907,7 @@
           <p:cNvPr id="3" name="">
             <a:extLst xmlns:a="http://schemas.openxmlformats.org/drawingml/2006/main">
               <a:ext uri="{FF2B5EF4-FFF2-40B4-BE49-F238E27FC236}">
-                <a16:creationId xmlns:a16="http://schemas.microsoft.com/office/drawing/2014/main" id="{7A4A7C57-C904-40F5-AFF2-CE82FB5357AE}"/>
+                <a16:creationId xmlns:a16="http://schemas.microsoft.com/office/drawing/2014/main" id="{CAD8A048-4DEA-42D2-A44E-0366DBD2967E}"/>
               </a:ext>
             </a:extLst>
           </p:cNvPr>
@@ -6939,7 +6939,7 @@
           <p:cNvPr id="4" name="">
             <a:extLst xmlns:a="http://schemas.openxmlformats.org/drawingml/2006/main">
               <a:ext uri="{FF2B5EF4-FFF2-40B4-BE49-F238E27FC236}">
-                <a16:creationId xmlns:a16="http://schemas.microsoft.com/office/drawing/2014/main" id="{1A6A3AB8-C5D7-40DF-8294-58A692C99E09}"/>
+                <a16:creationId xmlns:a16="http://schemas.microsoft.com/office/drawing/2014/main" id="{56B5C624-DBA7-45F0-B9BF-1ED9541512AF}"/>
               </a:ext>
             </a:extLst>
           </p:cNvPr>
@@ -6996,7 +6996,7 @@
           <p:cNvPr id="5" name="">
             <a:extLst xmlns:a="http://schemas.openxmlformats.org/drawingml/2006/main">
               <a:ext uri="{FF2B5EF4-FFF2-40B4-BE49-F238E27FC236}">
-                <a16:creationId xmlns:a16="http://schemas.microsoft.com/office/drawing/2014/main" id="{C03322E8-3344-47F8-BF4D-72EE47092EB6}"/>
+                <a16:creationId xmlns:a16="http://schemas.microsoft.com/office/drawing/2014/main" id="{4253E45A-8E5F-47C6-9B22-68F55738D0F7}"/>
               </a:ext>
             </a:extLst>
           </p:cNvPr>
@@ -7053,7 +7053,7 @@
           <p:cNvPr id="6" name="">
             <a:extLst xmlns:a="http://schemas.openxmlformats.org/drawingml/2006/main">
               <a:ext uri="{FF2B5EF4-FFF2-40B4-BE49-F238E27FC236}">
-                <a16:creationId xmlns:a16="http://schemas.microsoft.com/office/drawing/2014/main" id="{87160517-57FC-455E-8101-AFD7FE418AE4}"/>
+                <a16:creationId xmlns:a16="http://schemas.microsoft.com/office/drawing/2014/main" id="{8B96C1C0-3AD6-4A77-9F41-734D13A2F31A}"/>
               </a:ext>
             </a:extLst>
           </p:cNvPr>
@@ -7110,7 +7110,7 @@
           <p:cNvPr id="7" name="">
             <a:extLst xmlns:a="http://schemas.openxmlformats.org/drawingml/2006/main">
               <a:ext uri="{FF2B5EF4-FFF2-40B4-BE49-F238E27FC236}">
-                <a16:creationId xmlns:a16="http://schemas.microsoft.com/office/drawing/2014/main" id="{AA0F5C4A-A9C9-476C-B881-929952D27240}"/>
+                <a16:creationId xmlns:a16="http://schemas.microsoft.com/office/drawing/2014/main" id="{44ACD56B-F802-4A3F-9700-0B10C89F4EFC}"/>
               </a:ext>
             </a:extLst>
           </p:cNvPr>
@@ -7142,7 +7142,7 @@
           <p:cNvPr id="8" name="">
             <a:extLst xmlns:a="http://schemas.openxmlformats.org/drawingml/2006/main">
               <a:ext uri="{FF2B5EF4-FFF2-40B4-BE49-F238E27FC236}">
-                <a16:creationId xmlns:a16="http://schemas.microsoft.com/office/drawing/2014/main" id="{2178050D-65D5-4625-B530-9E0118E4F984}"/>
+                <a16:creationId xmlns:a16="http://schemas.microsoft.com/office/drawing/2014/main" id="{EC0BACDE-89AA-4C2C-8AC8-1EDE6FBECF6C}"/>
               </a:ext>
             </a:extLst>
           </p:cNvPr>
@@ -7199,7 +7199,7 @@
           <p:cNvPr id="9" name="">
             <a:extLst xmlns:a="http://schemas.openxmlformats.org/drawingml/2006/main">
               <a:ext uri="{FF2B5EF4-FFF2-40B4-BE49-F238E27FC236}">
-                <a16:creationId xmlns:a16="http://schemas.microsoft.com/office/drawing/2014/main" id="{F8D9FDD6-AF47-4053-9467-1779E2D62D16}"/>
+                <a16:creationId xmlns:a16="http://schemas.microsoft.com/office/drawing/2014/main" id="{A0936637-17B7-463D-AA16-BD941AA5DA26}"/>
               </a:ext>
             </a:extLst>
           </p:cNvPr>
@@ -7256,7 +7256,7 @@
           <p:cNvPr id="10" name="">
             <a:extLst xmlns:a="http://schemas.openxmlformats.org/drawingml/2006/main">
               <a:ext uri="{FF2B5EF4-FFF2-40B4-BE49-F238E27FC236}">
-                <a16:creationId xmlns:a16="http://schemas.microsoft.com/office/drawing/2014/main" id="{B63D8C45-D852-4A51-815B-852497A67BB9}"/>
+                <a16:creationId xmlns:a16="http://schemas.microsoft.com/office/drawing/2014/main" id="{91542736-F475-4DE0-B9B2-50D3153135A7}"/>
               </a:ext>
             </a:extLst>
           </p:cNvPr>
@@ -7313,7 +7313,7 @@
           <p:cNvPr id="11" name="">
             <a:extLst xmlns:a="http://schemas.openxmlformats.org/drawingml/2006/main">
               <a:ext uri="{FF2B5EF4-FFF2-40B4-BE49-F238E27FC236}">
-                <a16:creationId xmlns:a16="http://schemas.microsoft.com/office/drawing/2014/main" id="{01A05CF0-87AF-49F8-AE13-BA11CC69AEB2}"/>
+                <a16:creationId xmlns:a16="http://schemas.microsoft.com/office/drawing/2014/main" id="{1058D697-C911-433B-AB06-0167DCFE8F97}"/>
               </a:ext>
             </a:extLst>
           </p:cNvPr>
@@ -7345,7 +7345,7 @@
           <p:cNvPr id="12" name="">
             <a:extLst xmlns:a="http://schemas.openxmlformats.org/drawingml/2006/main">
               <a:ext uri="{FF2B5EF4-FFF2-40B4-BE49-F238E27FC236}">
-                <a16:creationId xmlns:a16="http://schemas.microsoft.com/office/drawing/2014/main" id="{2342101A-DE9A-4AAF-AC16-E124809A07DE}"/>
+                <a16:creationId xmlns:a16="http://schemas.microsoft.com/office/drawing/2014/main" id="{46000D5A-00F4-4C29-A73F-7B6C423C72AB}"/>
               </a:ext>
             </a:extLst>
           </p:cNvPr>
@@ -7402,7 +7402,7 @@
           <p:cNvPr id="13" name="">
             <a:extLst xmlns:a="http://schemas.openxmlformats.org/drawingml/2006/main">
               <a:ext uri="{FF2B5EF4-FFF2-40B4-BE49-F238E27FC236}">
-                <a16:creationId xmlns:a16="http://schemas.microsoft.com/office/drawing/2014/main" id="{37132602-C05C-489A-9AD1-4A62C5529B98}"/>
+                <a16:creationId xmlns:a16="http://schemas.microsoft.com/office/drawing/2014/main" id="{B38DCB78-541B-4123-8BDD-1A80B19DDE28}"/>
               </a:ext>
             </a:extLst>
           </p:cNvPr>
@@ -7459,7 +7459,7 @@
           <p:cNvPr id="14" name="">
             <a:extLst xmlns:a="http://schemas.openxmlformats.org/drawingml/2006/main">
               <a:ext uri="{FF2B5EF4-FFF2-40B4-BE49-F238E27FC236}">
-                <a16:creationId xmlns:a16="http://schemas.microsoft.com/office/drawing/2014/main" id="{BFAEA4BD-9BEC-43FB-A7C9-5C6FDE80D2C0}"/>
+                <a16:creationId xmlns:a16="http://schemas.microsoft.com/office/drawing/2014/main" id="{BD0100BA-52AF-4F91-A5A5-EE4EAD1E6EF8}"/>
               </a:ext>
             </a:extLst>
           </p:cNvPr>
@@ -7516,7 +7516,7 @@
           <p:cNvPr id="15" name="">
             <a:extLst xmlns:a="http://schemas.openxmlformats.org/drawingml/2006/main">
               <a:ext uri="{FF2B5EF4-FFF2-40B4-BE49-F238E27FC236}">
-                <a16:creationId xmlns:a16="http://schemas.microsoft.com/office/drawing/2014/main" id="{5BA17115-836E-4A26-99C9-9075B9724680}"/>
+                <a16:creationId xmlns:a16="http://schemas.microsoft.com/office/drawing/2014/main" id="{B2D4855D-0F59-477A-95D2-39EB0D660462}"/>
               </a:ext>
             </a:extLst>
           </p:cNvPr>
@@ -7571,7 +7571,7 @@
     </p:spTree>
     <p:extLst>
       <p:ext uri="{BB962C8B-B14F-4D97-AF65-F5344CB8AC3E}">
-        <p14:creationId xmlns:p14="http://schemas.microsoft.com/office/powerpoint/2010/main" val="752962248"/>
+        <p14:creationId xmlns:p14="http://schemas.microsoft.com/office/powerpoint/2010/main" val="577193615"/>
       </p:ext>
     </p:extLst>
   </p:cSld>
@@ -7769,10 +7769,10 @@
       </p:grpSpPr>
       <p:sp>
         <p:nvSpPr>
-          <p:cNvPr id="23" name="">
-            <a:extLst xmlns:a="http://schemas.openxmlformats.org/drawingml/2006/main">
-              <a:ext uri="{FF2B5EF4-FFF2-40B4-BE49-F238E27FC236}">
-                <a16:creationId xmlns:a16="http://schemas.microsoft.com/office/drawing/2014/main" id="{EDE2DEF8-7B00-4525-9FA1-4FA6C2D398AB}"/>
+          <p:cNvPr id="26" name="">
+            <a:extLst xmlns:a="http://schemas.openxmlformats.org/drawingml/2006/main">
+              <a:ext uri="{FF2B5EF4-FFF2-40B4-BE49-F238E27FC236}">
+                <a16:creationId xmlns:a16="http://schemas.microsoft.com/office/drawing/2014/main" id="{26EC3BC2-9CAC-477C-8C69-F291FF9418E0}"/>
               </a:ext>
             </a:extLst>
           </p:cNvPr>
@@ -7804,7 +7804,7 @@
           <p:cNvPr id="2" name="">
             <a:extLst xmlns:a="http://schemas.openxmlformats.org/drawingml/2006/main">
               <a:ext uri="{FF2B5EF4-FFF2-40B4-BE49-F238E27FC236}">
-                <a16:creationId xmlns:a16="http://schemas.microsoft.com/office/drawing/2014/main" id="{69CE141F-261A-4B6C-9795-7E31DB7010A5}"/>
+                <a16:creationId xmlns:a16="http://schemas.microsoft.com/office/drawing/2014/main" id="{9901C7CE-8230-446E-A578-AD8D184674AE}"/>
               </a:ext>
             </a:extLst>
           </p:cNvPr>
@@ -7861,7 +7861,7 @@
           <p:cNvPr id="3" name="">
             <a:extLst xmlns:a="http://schemas.openxmlformats.org/drawingml/2006/main">
               <a:ext uri="{FF2B5EF4-FFF2-40B4-BE49-F238E27FC236}">
-                <a16:creationId xmlns:a16="http://schemas.microsoft.com/office/drawing/2014/main" id="{CA0D154C-167C-48BD-899F-72024A48A4E8}"/>
+                <a16:creationId xmlns:a16="http://schemas.microsoft.com/office/drawing/2014/main" id="{A41A0B88-2132-4DF4-AAB2-6EE234A0E86E}"/>
               </a:ext>
             </a:extLst>
           </p:cNvPr>
@@ -7893,7 +7893,7 @@
           <p:cNvPr id="4" name="">
             <a:extLst xmlns:a="http://schemas.openxmlformats.org/drawingml/2006/main">
               <a:ext uri="{FF2B5EF4-FFF2-40B4-BE49-F238E27FC236}">
-                <a16:creationId xmlns:a16="http://schemas.microsoft.com/office/drawing/2014/main" id="{1A699F6F-6579-424B-80AC-F4FA2E6C2F63}"/>
+                <a16:creationId xmlns:a16="http://schemas.microsoft.com/office/drawing/2014/main" id="{4DD30C8A-8ABE-422F-B06A-9227B666A851}"/>
               </a:ext>
             </a:extLst>
           </p:cNvPr>
@@ -7950,7 +7950,7 @@
           <p:cNvPr id="5" name="">
             <a:extLst xmlns:a="http://schemas.openxmlformats.org/drawingml/2006/main">
               <a:ext uri="{FF2B5EF4-FFF2-40B4-BE49-F238E27FC236}">
-                <a16:creationId xmlns:a16="http://schemas.microsoft.com/office/drawing/2014/main" id="{E12F4BF3-EDFC-4375-8146-F3E447243988}"/>
+                <a16:creationId xmlns:a16="http://schemas.microsoft.com/office/drawing/2014/main" id="{22B86F24-A3FA-4F47-9516-A2B3416E499F}"/>
               </a:ext>
             </a:extLst>
           </p:cNvPr>
@@ -8007,7 +8007,7 @@
           <p:cNvPr id="6" name="">
             <a:extLst xmlns:a="http://schemas.openxmlformats.org/drawingml/2006/main">
               <a:ext uri="{FF2B5EF4-FFF2-40B4-BE49-F238E27FC236}">
-                <a16:creationId xmlns:a16="http://schemas.microsoft.com/office/drawing/2014/main" id="{0A809F51-3C0C-425A-9CBD-F742A7654B2C}"/>
+                <a16:creationId xmlns:a16="http://schemas.microsoft.com/office/drawing/2014/main" id="{3100BC11-9450-471A-9AD0-B481C8DD474B}"/>
               </a:ext>
             </a:extLst>
           </p:cNvPr>
@@ -8064,7 +8064,7 @@
           <p:cNvPr id="7" name="">
             <a:extLst xmlns:a="http://schemas.openxmlformats.org/drawingml/2006/main">
               <a:ext uri="{FF2B5EF4-FFF2-40B4-BE49-F238E27FC236}">
-                <a16:creationId xmlns:a16="http://schemas.microsoft.com/office/drawing/2014/main" id="{7BC05747-96F2-4A8A-B74F-1915B53DFCDF}"/>
+                <a16:creationId xmlns:a16="http://schemas.microsoft.com/office/drawing/2014/main" id="{6DE532A5-4C8E-42C7-A04F-1B838108F8F1}"/>
               </a:ext>
             </a:extLst>
           </p:cNvPr>
@@ -8096,7 +8096,7 @@
           <p:cNvPr id="8" name="">
             <a:extLst xmlns:a="http://schemas.openxmlformats.org/drawingml/2006/main">
               <a:ext uri="{FF2B5EF4-FFF2-40B4-BE49-F238E27FC236}">
-                <a16:creationId xmlns:a16="http://schemas.microsoft.com/office/drawing/2014/main" id="{D7F8B2B1-74A3-44E6-A3B5-98B9BF107367}"/>
+                <a16:creationId xmlns:a16="http://schemas.microsoft.com/office/drawing/2014/main" id="{A624FBA1-02AB-4423-B0F8-A35629913DD6}"/>
               </a:ext>
             </a:extLst>
           </p:cNvPr>
@@ -8153,7 +8153,7 @@
           <p:cNvPr id="9" name="">
             <a:extLst xmlns:a="http://schemas.openxmlformats.org/drawingml/2006/main">
               <a:ext uri="{FF2B5EF4-FFF2-40B4-BE49-F238E27FC236}">
-                <a16:creationId xmlns:a16="http://schemas.microsoft.com/office/drawing/2014/main" id="{06749B36-F79D-43E5-A6BD-DD5CFA55D528}"/>
+                <a16:creationId xmlns:a16="http://schemas.microsoft.com/office/drawing/2014/main" id="{F53989B0-14FF-487C-B69B-5801B0586DEE}"/>
               </a:ext>
             </a:extLst>
           </p:cNvPr>
@@ -8210,19 +8210,19 @@
           <p:cNvPr id="10" name="">
             <a:extLst xmlns:a="http://schemas.openxmlformats.org/drawingml/2006/main">
               <a:ext uri="{FF2B5EF4-FFF2-40B4-BE49-F238E27FC236}">
-                <a16:creationId xmlns:a16="http://schemas.microsoft.com/office/drawing/2014/main" id="{642EB5ED-A02D-4670-8B09-329E56A3507A}"/>
-              </a:ext>
-            </a:extLst>
-          </p:cNvPr>
-          <p:cNvSpPr>
-            <a:spLocks xmlns:a="http://schemas.openxmlformats.org/drawingml/2006/main" noGrp="1"/>
-          </p:cNvSpPr>
-          <p:nvPr/>
-        </p:nvSpPr>
-        <p:spPr>
-          <a:xfrm xmlns:a="http://schemas.openxmlformats.org/drawingml/2006/main">
-            <a:off x="914400" y="1257300"/>
-            <a:ext cx="10363200" cy="781050"/>
+                <a16:creationId xmlns:a16="http://schemas.microsoft.com/office/drawing/2014/main" id="{F213C840-244F-4E77-9F18-A1BAB525BD91}"/>
+              </a:ext>
+            </a:extLst>
+          </p:cNvPr>
+          <p:cNvSpPr>
+            <a:spLocks xmlns:a="http://schemas.openxmlformats.org/drawingml/2006/main" noGrp="1"/>
+          </p:cNvSpPr>
+          <p:nvPr/>
+        </p:nvSpPr>
+        <p:spPr>
+          <a:xfrm xmlns:a="http://schemas.openxmlformats.org/drawingml/2006/main">
+            <a:off x="857250" y="1219200"/>
+            <a:ext cx="10477500" cy="742950"/>
           </a:xfrm>
           <a:prstGeom xmlns:a="http://schemas.openxmlformats.org/drawingml/2006/main" prst="rect">
             <a:avLst/>
@@ -8239,7 +8239,7 @@
           <a:lstStyle xmlns:a="http://schemas.openxmlformats.org/drawingml/2006/main"/>
           <a:p xmlns:a="http://schemas.openxmlformats.org/drawingml/2006/main">
             <a:pPr algn="ctr">
-              <a:defRPr sz="2175" b="1">
+              <a:defRPr sz="2100" b="1">
                 <a:solidFill>
                   <a:srgbClr val="17253A"/>
                 </a:solidFill>
@@ -8249,7 +8249,7 @@
               </a:defRPr>
             </a:pPr>
             <a:r>
-              <a:rPr sz="2175" b="1">
+              <a:rPr sz="2100" b="1">
                 <a:solidFill>
                   <a:srgbClr val="17253A"/>
                 </a:solidFill>
@@ -8267,28 +8267,30 @@
           <p:cNvPr id="11" name="">
             <a:extLst xmlns:a="http://schemas.openxmlformats.org/drawingml/2006/main">
               <a:ext uri="{FF2B5EF4-FFF2-40B4-BE49-F238E27FC236}">
-                <a16:creationId xmlns:a16="http://schemas.microsoft.com/office/drawing/2014/main" id="{1B04A9C1-0262-4B09-9C7C-19EEC8E8C71C}"/>
-              </a:ext>
-            </a:extLst>
-          </p:cNvPr>
-          <p:cNvSpPr>
-            <a:spLocks xmlns:a="http://schemas.openxmlformats.org/drawingml/2006/main" noGrp="1"/>
-          </p:cNvSpPr>
-          <p:nvPr/>
-        </p:nvSpPr>
-        <p:spPr>
-          <a:xfrm xmlns:a="http://schemas.openxmlformats.org/drawingml/2006/main">
-            <a:off x="1000125" y="2247900"/>
-            <a:ext cx="476250" cy="476250"/>
-          </a:xfrm>
-          <a:prstGeom xmlns:a="http://schemas.openxmlformats.org/drawingml/2006/main" prst="ellipse">
+                <a16:creationId xmlns:a16="http://schemas.microsoft.com/office/drawing/2014/main" id="{BEBC7BA0-0D6F-447F-AFE3-4CF5322FA0E4}"/>
+              </a:ext>
+            </a:extLst>
+          </p:cNvPr>
+          <p:cNvSpPr>
+            <a:spLocks xmlns:a="http://schemas.openxmlformats.org/drawingml/2006/main" noGrp="1"/>
+          </p:cNvSpPr>
+          <p:nvPr/>
+        </p:nvSpPr>
+        <p:spPr>
+          <a:xfrm xmlns:a="http://schemas.openxmlformats.org/drawingml/2006/main">
+            <a:off x="971550" y="2124075"/>
+            <a:ext cx="38100" cy="3524250"/>
+          </a:xfrm>
+          <a:prstGeom xmlns:a="http://schemas.openxmlformats.org/drawingml/2006/main" prst="rect">
             <a:avLst/>
           </a:prstGeom>
           <a:solidFill xmlns:a="http://schemas.openxmlformats.org/drawingml/2006/main">
-            <a:srgbClr val="18324A"/>
+            <a:srgbClr val="2C6E73"/>
           </a:solidFill>
           <a:ln xmlns:a="http://schemas.openxmlformats.org/drawingml/2006/main" w="0">
-            <a:noFill/>
+            <a:solidFill>
+              <a:srgbClr val="2C6E73"/>
+            </a:solidFill>
           </a:ln>
         </p:spPr>
       </p:sp>
@@ -8297,19 +8299,19 @@
           <p:cNvPr id="12" name="">
             <a:extLst xmlns:a="http://schemas.openxmlformats.org/drawingml/2006/main">
               <a:ext uri="{FF2B5EF4-FFF2-40B4-BE49-F238E27FC236}">
-                <a16:creationId xmlns:a16="http://schemas.microsoft.com/office/drawing/2014/main" id="{A1075A94-5EFD-4751-95C5-4A07D083A015}"/>
-              </a:ext>
-            </a:extLst>
-          </p:cNvPr>
-          <p:cNvSpPr>
-            <a:spLocks xmlns:a="http://schemas.openxmlformats.org/drawingml/2006/main" noGrp="1"/>
-          </p:cNvSpPr>
-          <p:nvPr/>
-        </p:nvSpPr>
-        <p:spPr>
-          <a:xfrm xmlns:a="http://schemas.openxmlformats.org/drawingml/2006/main">
-            <a:off x="1000125" y="2276475"/>
-            <a:ext cx="476250" cy="419100"/>
+                <a16:creationId xmlns:a16="http://schemas.microsoft.com/office/drawing/2014/main" id="{730F4806-638A-432F-B1EE-321F58CE7CEF}"/>
+              </a:ext>
+            </a:extLst>
+          </p:cNvPr>
+          <p:cNvSpPr>
+            <a:spLocks xmlns:a="http://schemas.openxmlformats.org/drawingml/2006/main" noGrp="1"/>
+          </p:cNvSpPr>
+          <p:nvPr/>
+        </p:nvSpPr>
+        <p:spPr>
+          <a:xfrm xmlns:a="http://schemas.openxmlformats.org/drawingml/2006/main">
+            <a:off x="1162050" y="2200275"/>
+            <a:ext cx="400050" cy="400050"/>
           </a:xfrm>
           <a:prstGeom xmlns:a="http://schemas.openxmlformats.org/drawingml/2006/main" prst="rect">
             <a:avLst/>
@@ -8326,9 +8328,9 @@
           <a:lstStyle xmlns:a="http://schemas.openxmlformats.org/drawingml/2006/main"/>
           <a:p xmlns:a="http://schemas.openxmlformats.org/drawingml/2006/main">
             <a:pPr algn="ctr">
-              <a:defRPr sz="1350" b="1">
-                <a:solidFill>
-                  <a:srgbClr val="FFFFFF"/>
+              <a:defRPr sz="1125" b="1">
+                <a:solidFill>
+                  <a:srgbClr val="2C6E73"/>
                 </a:solidFill>
                 <a:latin typeface="Arial"/>
                 <a:ea typeface="Arial"/>
@@ -8336,9 +8338,9 @@
               </a:defRPr>
             </a:pPr>
             <a:r>
-              <a:rPr sz="1350" b="1">
-                <a:solidFill>
-                  <a:srgbClr val="FFFFFF"/>
+              <a:rPr sz="1125" b="1">
+                <a:solidFill>
+                  <a:srgbClr val="2C6E73"/>
                 </a:solidFill>
                 <a:latin typeface="Arial"/>
                 <a:ea typeface="Arial"/>
@@ -8354,19 +8356,19 @@
           <p:cNvPr id="13" name="">
             <a:extLst xmlns:a="http://schemas.openxmlformats.org/drawingml/2006/main">
               <a:ext uri="{FF2B5EF4-FFF2-40B4-BE49-F238E27FC236}">
-                <a16:creationId xmlns:a16="http://schemas.microsoft.com/office/drawing/2014/main" id="{C307D6F3-DFC9-4F66-8485-FB9713BE3E27}"/>
-              </a:ext>
-            </a:extLst>
-          </p:cNvPr>
-          <p:cNvSpPr>
-            <a:spLocks xmlns:a="http://schemas.openxmlformats.org/drawingml/2006/main" noGrp="1"/>
-          </p:cNvSpPr>
-          <p:nvPr/>
-        </p:nvSpPr>
-        <p:spPr>
-          <a:xfrm xmlns:a="http://schemas.openxmlformats.org/drawingml/2006/main">
-            <a:off x="1714500" y="2181225"/>
-            <a:ext cx="9429750" cy="609600"/>
+                <a16:creationId xmlns:a16="http://schemas.microsoft.com/office/drawing/2014/main" id="{9422E893-1D30-4A9C-938F-9D013D77767D}"/>
+              </a:ext>
+            </a:extLst>
+          </p:cNvPr>
+          <p:cNvSpPr>
+            <a:spLocks xmlns:a="http://schemas.openxmlformats.org/drawingml/2006/main" noGrp="1"/>
+          </p:cNvSpPr>
+          <p:nvPr/>
+        </p:nvSpPr>
+        <p:spPr>
+          <a:xfrm xmlns:a="http://schemas.openxmlformats.org/drawingml/2006/main">
+            <a:off x="1714500" y="2114550"/>
+            <a:ext cx="9525000" cy="638175"/>
           </a:xfrm>
           <a:prstGeom xmlns:a="http://schemas.openxmlformats.org/drawingml/2006/main" prst="rect">
             <a:avLst/>
@@ -8383,7 +8385,7 @@
           <a:lstStyle xmlns:a="http://schemas.openxmlformats.org/drawingml/2006/main"/>
           <a:p xmlns:a="http://schemas.openxmlformats.org/drawingml/2006/main">
             <a:pPr algn="l">
-              <a:defRPr sz="1500" b="0">
+              <a:defRPr sz="1575" b="0">
                 <a:solidFill>
                   <a:srgbClr val="17253A"/>
                 </a:solidFill>
@@ -8393,7 +8395,7 @@
               </a:defRPr>
             </a:pPr>
             <a:r>
-              <a:rPr sz="1500" b="0">
+              <a:rPr sz="1575" b="0">
                 <a:solidFill>
                   <a:srgbClr val="17253A"/>
                 </a:solidFill>
@@ -8401,7 +8403,7 @@
                 <a:ea typeface="Arial"/>
                 <a:cs typeface="Arial"/>
               </a:rPr>
-              <a:t>Identify the structure: Identify which quantities the ratio compares and keep their order.</a:t>
+              <a:t>Red : white = 3 : 5</a:t>
             </a:r>
           </a:p>
         </p:txBody>
@@ -8411,28 +8413,30 @@
           <p:cNvPr id="14" name="">
             <a:extLst xmlns:a="http://schemas.openxmlformats.org/drawingml/2006/main">
               <a:ext uri="{FF2B5EF4-FFF2-40B4-BE49-F238E27FC236}">
-                <a16:creationId xmlns:a16="http://schemas.microsoft.com/office/drawing/2014/main" id="{07B5261D-2529-4FE0-B092-B5AC75942F1E}"/>
-              </a:ext>
-            </a:extLst>
-          </p:cNvPr>
-          <p:cNvSpPr>
-            <a:spLocks xmlns:a="http://schemas.openxmlformats.org/drawingml/2006/main" noGrp="1"/>
-          </p:cNvSpPr>
-          <p:nvPr/>
-        </p:nvSpPr>
-        <p:spPr>
-          <a:xfrm xmlns:a="http://schemas.openxmlformats.org/drawingml/2006/main">
-            <a:off x="1000125" y="2990850"/>
-            <a:ext cx="476250" cy="476250"/>
-          </a:xfrm>
-          <a:prstGeom xmlns:a="http://schemas.openxmlformats.org/drawingml/2006/main" prst="ellipse">
+                <a16:creationId xmlns:a16="http://schemas.microsoft.com/office/drawing/2014/main" id="{35C57864-DA93-4E56-A79C-993FE5464C53}"/>
+              </a:ext>
+            </a:extLst>
+          </p:cNvPr>
+          <p:cNvSpPr>
+            <a:spLocks xmlns:a="http://schemas.openxmlformats.org/drawingml/2006/main" noGrp="1"/>
+          </p:cNvSpPr>
+          <p:nvPr/>
+        </p:nvSpPr>
+        <p:spPr>
+          <a:xfrm xmlns:a="http://schemas.openxmlformats.org/drawingml/2006/main">
+            <a:off x="1714500" y="2771775"/>
+            <a:ext cx="9334500" cy="9525"/>
+          </a:xfrm>
+          <a:prstGeom xmlns:a="http://schemas.openxmlformats.org/drawingml/2006/main" prst="rect">
             <a:avLst/>
           </a:prstGeom>
           <a:solidFill xmlns:a="http://schemas.openxmlformats.org/drawingml/2006/main">
-            <a:srgbClr val="2C6E73"/>
+            <a:srgbClr val="D9E0E6"/>
           </a:solidFill>
           <a:ln xmlns:a="http://schemas.openxmlformats.org/drawingml/2006/main" w="0">
-            <a:noFill/>
+            <a:solidFill>
+              <a:srgbClr val="D9E0E6"/>
+            </a:solidFill>
           </a:ln>
         </p:spPr>
       </p:sp>
@@ -8441,19 +8445,19 @@
           <p:cNvPr id="15" name="">
             <a:extLst xmlns:a="http://schemas.openxmlformats.org/drawingml/2006/main">
               <a:ext uri="{FF2B5EF4-FFF2-40B4-BE49-F238E27FC236}">
-                <a16:creationId xmlns:a16="http://schemas.microsoft.com/office/drawing/2014/main" id="{DD2BE6FF-373E-4BE7-A3A2-CB1F9E6C8424}"/>
-              </a:ext>
-            </a:extLst>
-          </p:cNvPr>
-          <p:cNvSpPr>
-            <a:spLocks xmlns:a="http://schemas.openxmlformats.org/drawingml/2006/main" noGrp="1"/>
-          </p:cNvSpPr>
-          <p:nvPr/>
-        </p:nvSpPr>
-        <p:spPr>
-          <a:xfrm xmlns:a="http://schemas.openxmlformats.org/drawingml/2006/main">
-            <a:off x="1000125" y="3019425"/>
-            <a:ext cx="476250" cy="419100"/>
+                <a16:creationId xmlns:a16="http://schemas.microsoft.com/office/drawing/2014/main" id="{2E55A72E-57DD-4E2A-BA35-DB6AB6D271EB}"/>
+              </a:ext>
+            </a:extLst>
+          </p:cNvPr>
+          <p:cNvSpPr>
+            <a:spLocks xmlns:a="http://schemas.openxmlformats.org/drawingml/2006/main" noGrp="1"/>
+          </p:cNvSpPr>
+          <p:nvPr/>
+        </p:nvSpPr>
+        <p:spPr>
+          <a:xfrm xmlns:a="http://schemas.openxmlformats.org/drawingml/2006/main">
+            <a:off x="1162050" y="2905125"/>
+            <a:ext cx="400050" cy="400050"/>
           </a:xfrm>
           <a:prstGeom xmlns:a="http://schemas.openxmlformats.org/drawingml/2006/main" prst="rect">
             <a:avLst/>
@@ -8470,9 +8474,9 @@
           <a:lstStyle xmlns:a="http://schemas.openxmlformats.org/drawingml/2006/main"/>
           <a:p xmlns:a="http://schemas.openxmlformats.org/drawingml/2006/main">
             <a:pPr algn="ctr">
-              <a:defRPr sz="1350" b="1">
-                <a:solidFill>
-                  <a:srgbClr val="FFFFFF"/>
+              <a:defRPr sz="1125" b="1">
+                <a:solidFill>
+                  <a:srgbClr val="2C6E73"/>
                 </a:solidFill>
                 <a:latin typeface="Arial"/>
                 <a:ea typeface="Arial"/>
@@ -8480,9 +8484,9 @@
               </a:defRPr>
             </a:pPr>
             <a:r>
-              <a:rPr sz="1350" b="1">
-                <a:solidFill>
-                  <a:srgbClr val="FFFFFF"/>
+              <a:rPr sz="1125" b="1">
+                <a:solidFill>
+                  <a:srgbClr val="2C6E73"/>
                 </a:solidFill>
                 <a:latin typeface="Arial"/>
                 <a:ea typeface="Arial"/>
@@ -8498,19 +8502,19 @@
           <p:cNvPr id="16" name="">
             <a:extLst xmlns:a="http://schemas.openxmlformats.org/drawingml/2006/main">
               <a:ext uri="{FF2B5EF4-FFF2-40B4-BE49-F238E27FC236}">
-                <a16:creationId xmlns:a16="http://schemas.microsoft.com/office/drawing/2014/main" id="{B1F0D77F-DB58-4245-9F64-0E24EC970F1D}"/>
-              </a:ext>
-            </a:extLst>
-          </p:cNvPr>
-          <p:cNvSpPr>
-            <a:spLocks xmlns:a="http://schemas.openxmlformats.org/drawingml/2006/main" noGrp="1"/>
-          </p:cNvSpPr>
-          <p:nvPr/>
-        </p:nvSpPr>
-        <p:spPr>
-          <a:xfrm xmlns:a="http://schemas.openxmlformats.org/drawingml/2006/main">
-            <a:off x="1714500" y="2924175"/>
-            <a:ext cx="9429750" cy="609600"/>
+                <a16:creationId xmlns:a16="http://schemas.microsoft.com/office/drawing/2014/main" id="{14B91DA0-1CA9-4ABC-839E-327703D6E68D}"/>
+              </a:ext>
+            </a:extLst>
+          </p:cNvPr>
+          <p:cNvSpPr>
+            <a:spLocks xmlns:a="http://schemas.openxmlformats.org/drawingml/2006/main" noGrp="1"/>
+          </p:cNvSpPr>
+          <p:nvPr/>
+        </p:nvSpPr>
+        <p:spPr>
+          <a:xfrm xmlns:a="http://schemas.openxmlformats.org/drawingml/2006/main">
+            <a:off x="1714500" y="2819400"/>
+            <a:ext cx="9525000" cy="638175"/>
           </a:xfrm>
           <a:prstGeom xmlns:a="http://schemas.openxmlformats.org/drawingml/2006/main" prst="rect">
             <a:avLst/>
@@ -8527,7 +8531,7 @@
           <a:lstStyle xmlns:a="http://schemas.openxmlformats.org/drawingml/2006/main"/>
           <a:p xmlns:a="http://schemas.openxmlformats.org/drawingml/2006/main">
             <a:pPr algn="l">
-              <a:defRPr sz="1500" b="0">
+              <a:defRPr sz="1575" b="0">
                 <a:solidFill>
                   <a:srgbClr val="17253A"/>
                 </a:solidFill>
@@ -8537,7 +8541,7 @@
               </a:defRPr>
             </a:pPr>
             <a:r>
-              <a:rPr sz="1500" b="0">
+              <a:rPr sz="1575" b="0">
                 <a:solidFill>
                   <a:srgbClr val="17253A"/>
                 </a:solidFill>
@@ -8545,7 +8549,7 @@
                 <a:ea typeface="Arial"/>
                 <a:cs typeface="Arial"/>
               </a:rPr>
-              <a:t>Set up the method: Scale both parts by the same factor.</a:t>
+              <a:t>3 parts = 18 ml</a:t>
             </a:r>
           </a:p>
         </p:txBody>
@@ -8555,28 +8559,30 @@
           <p:cNvPr id="17" name="">
             <a:extLst xmlns:a="http://schemas.openxmlformats.org/drawingml/2006/main">
               <a:ext uri="{FF2B5EF4-FFF2-40B4-BE49-F238E27FC236}">
-                <a16:creationId xmlns:a16="http://schemas.microsoft.com/office/drawing/2014/main" id="{0681A5DD-27C4-48FF-A3A2-37A49AA8508A}"/>
-              </a:ext>
-            </a:extLst>
-          </p:cNvPr>
-          <p:cNvSpPr>
-            <a:spLocks xmlns:a="http://schemas.openxmlformats.org/drawingml/2006/main" noGrp="1"/>
-          </p:cNvSpPr>
-          <p:nvPr/>
-        </p:nvSpPr>
-        <p:spPr>
-          <a:xfrm xmlns:a="http://schemas.openxmlformats.org/drawingml/2006/main">
-            <a:off x="1000125" y="3733800"/>
-            <a:ext cx="476250" cy="476250"/>
-          </a:xfrm>
-          <a:prstGeom xmlns:a="http://schemas.openxmlformats.org/drawingml/2006/main" prst="ellipse">
+                <a16:creationId xmlns:a16="http://schemas.microsoft.com/office/drawing/2014/main" id="{DA28EDE1-1A49-479C-A1C0-DC3B08164D14}"/>
+              </a:ext>
+            </a:extLst>
+          </p:cNvPr>
+          <p:cNvSpPr>
+            <a:spLocks xmlns:a="http://schemas.openxmlformats.org/drawingml/2006/main" noGrp="1"/>
+          </p:cNvSpPr>
+          <p:nvPr/>
+        </p:nvSpPr>
+        <p:spPr>
+          <a:xfrm xmlns:a="http://schemas.openxmlformats.org/drawingml/2006/main">
+            <a:off x="1714500" y="3476625"/>
+            <a:ext cx="9334500" cy="9525"/>
+          </a:xfrm>
+          <a:prstGeom xmlns:a="http://schemas.openxmlformats.org/drawingml/2006/main" prst="rect">
             <a:avLst/>
           </a:prstGeom>
           <a:solidFill xmlns:a="http://schemas.openxmlformats.org/drawingml/2006/main">
-            <a:srgbClr val="2C6E73"/>
+            <a:srgbClr val="D9E0E6"/>
           </a:solidFill>
           <a:ln xmlns:a="http://schemas.openxmlformats.org/drawingml/2006/main" w="0">
-            <a:noFill/>
+            <a:solidFill>
+              <a:srgbClr val="D9E0E6"/>
+            </a:solidFill>
           </a:ln>
         </p:spPr>
       </p:sp>
@@ -8585,19 +8591,19 @@
           <p:cNvPr id="18" name="">
             <a:extLst xmlns:a="http://schemas.openxmlformats.org/drawingml/2006/main">
               <a:ext uri="{FF2B5EF4-FFF2-40B4-BE49-F238E27FC236}">
-                <a16:creationId xmlns:a16="http://schemas.microsoft.com/office/drawing/2014/main" id="{66F97E79-24F0-4E39-A981-20970F359582}"/>
-              </a:ext>
-            </a:extLst>
-          </p:cNvPr>
-          <p:cNvSpPr>
-            <a:spLocks xmlns:a="http://schemas.openxmlformats.org/drawingml/2006/main" noGrp="1"/>
-          </p:cNvSpPr>
-          <p:nvPr/>
-        </p:nvSpPr>
-        <p:spPr>
-          <a:xfrm xmlns:a="http://schemas.openxmlformats.org/drawingml/2006/main">
-            <a:off x="1000125" y="3762375"/>
-            <a:ext cx="476250" cy="419100"/>
+                <a16:creationId xmlns:a16="http://schemas.microsoft.com/office/drawing/2014/main" id="{D46CB257-C947-49BE-9660-B68802AB98B4}"/>
+              </a:ext>
+            </a:extLst>
+          </p:cNvPr>
+          <p:cNvSpPr>
+            <a:spLocks xmlns:a="http://schemas.openxmlformats.org/drawingml/2006/main" noGrp="1"/>
+          </p:cNvSpPr>
+          <p:nvPr/>
+        </p:nvSpPr>
+        <p:spPr>
+          <a:xfrm xmlns:a="http://schemas.openxmlformats.org/drawingml/2006/main">
+            <a:off x="1162050" y="3609975"/>
+            <a:ext cx="400050" cy="400050"/>
           </a:xfrm>
           <a:prstGeom xmlns:a="http://schemas.openxmlformats.org/drawingml/2006/main" prst="rect">
             <a:avLst/>
@@ -8614,9 +8620,9 @@
           <a:lstStyle xmlns:a="http://schemas.openxmlformats.org/drawingml/2006/main"/>
           <a:p xmlns:a="http://schemas.openxmlformats.org/drawingml/2006/main">
             <a:pPr algn="ctr">
-              <a:defRPr sz="1350" b="1">
-                <a:solidFill>
-                  <a:srgbClr val="FFFFFF"/>
+              <a:defRPr sz="1125" b="1">
+                <a:solidFill>
+                  <a:srgbClr val="2C6E73"/>
                 </a:solidFill>
                 <a:latin typeface="Arial"/>
                 <a:ea typeface="Arial"/>
@@ -8624,9 +8630,9 @@
               </a:defRPr>
             </a:pPr>
             <a:r>
-              <a:rPr sz="1350" b="1">
-                <a:solidFill>
-                  <a:srgbClr val="FFFFFF"/>
+              <a:rPr sz="1125" b="1">
+                <a:solidFill>
+                  <a:srgbClr val="2C6E73"/>
                 </a:solidFill>
                 <a:latin typeface="Arial"/>
                 <a:ea typeface="Arial"/>
@@ -8642,19 +8648,19 @@
           <p:cNvPr id="19" name="">
             <a:extLst xmlns:a="http://schemas.openxmlformats.org/drawingml/2006/main">
               <a:ext uri="{FF2B5EF4-FFF2-40B4-BE49-F238E27FC236}">
-                <a16:creationId xmlns:a16="http://schemas.microsoft.com/office/drawing/2014/main" id="{F2BDA584-04B9-4E1E-8A3D-9A0FFD83713F}"/>
-              </a:ext>
-            </a:extLst>
-          </p:cNvPr>
-          <p:cNvSpPr>
-            <a:spLocks xmlns:a="http://schemas.openxmlformats.org/drawingml/2006/main" noGrp="1"/>
-          </p:cNvSpPr>
-          <p:nvPr/>
-        </p:nvSpPr>
-        <p:spPr>
-          <a:xfrm xmlns:a="http://schemas.openxmlformats.org/drawingml/2006/main">
-            <a:off x="1714500" y="3667125"/>
-            <a:ext cx="9429750" cy="609600"/>
+                <a16:creationId xmlns:a16="http://schemas.microsoft.com/office/drawing/2014/main" id="{1C06561A-EE34-4B64-9956-FE38CB3B2692}"/>
+              </a:ext>
+            </a:extLst>
+          </p:cNvPr>
+          <p:cNvSpPr>
+            <a:spLocks xmlns:a="http://schemas.openxmlformats.org/drawingml/2006/main" noGrp="1"/>
+          </p:cNvSpPr>
+          <p:nvPr/>
+        </p:nvSpPr>
+        <p:spPr>
+          <a:xfrm xmlns:a="http://schemas.openxmlformats.org/drawingml/2006/main">
+            <a:off x="1714500" y="3524250"/>
+            <a:ext cx="9525000" cy="638175"/>
           </a:xfrm>
           <a:prstGeom xmlns:a="http://schemas.openxmlformats.org/drawingml/2006/main" prst="rect">
             <a:avLst/>
@@ -8671,7 +8677,7 @@
           <a:lstStyle xmlns:a="http://schemas.openxmlformats.org/drawingml/2006/main"/>
           <a:p xmlns:a="http://schemas.openxmlformats.org/drawingml/2006/main">
             <a:pPr algn="l">
-              <a:defRPr sz="1500" b="0">
+              <a:defRPr sz="1575" b="0">
                 <a:solidFill>
                   <a:srgbClr val="17253A"/>
                 </a:solidFill>
@@ -8681,7 +8687,7 @@
               </a:defRPr>
             </a:pPr>
             <a:r>
-              <a:rPr sz="1500" b="0">
+              <a:rPr sz="1575" b="0">
                 <a:solidFill>
                   <a:srgbClr val="17253A"/>
                 </a:solidFill>
@@ -8689,7 +8695,7 @@
                 <a:ea typeface="Arial"/>
                 <a:cs typeface="Arial"/>
               </a:rPr>
-              <a:t>Complete the calculation: 30 ml.</a:t>
+              <a:t>1 part = 18 ÷ 3 = 6 ml</a:t>
             </a:r>
           </a:p>
         </p:txBody>
@@ -8699,28 +8705,30 @@
           <p:cNvPr id="20" name="">
             <a:extLst xmlns:a="http://schemas.openxmlformats.org/drawingml/2006/main">
               <a:ext uri="{FF2B5EF4-FFF2-40B4-BE49-F238E27FC236}">
-                <a16:creationId xmlns:a16="http://schemas.microsoft.com/office/drawing/2014/main" id="{9AE051A7-A6FF-4456-B33B-5E04716977C8}"/>
-              </a:ext>
-            </a:extLst>
-          </p:cNvPr>
-          <p:cNvSpPr>
-            <a:spLocks xmlns:a="http://schemas.openxmlformats.org/drawingml/2006/main" noGrp="1"/>
-          </p:cNvSpPr>
-          <p:nvPr/>
-        </p:nvSpPr>
-        <p:spPr>
-          <a:xfrm xmlns:a="http://schemas.openxmlformats.org/drawingml/2006/main">
-            <a:off x="1000125" y="4476750"/>
-            <a:ext cx="476250" cy="476250"/>
-          </a:xfrm>
-          <a:prstGeom xmlns:a="http://schemas.openxmlformats.org/drawingml/2006/main" prst="ellipse">
+                <a16:creationId xmlns:a16="http://schemas.microsoft.com/office/drawing/2014/main" id="{2755AB03-DD0F-48DB-8CB0-44DC04B34507}"/>
+              </a:ext>
+            </a:extLst>
+          </p:cNvPr>
+          <p:cNvSpPr>
+            <a:spLocks xmlns:a="http://schemas.openxmlformats.org/drawingml/2006/main" noGrp="1"/>
+          </p:cNvSpPr>
+          <p:nvPr/>
+        </p:nvSpPr>
+        <p:spPr>
+          <a:xfrm xmlns:a="http://schemas.openxmlformats.org/drawingml/2006/main">
+            <a:off x="1714500" y="4181475"/>
+            <a:ext cx="9334500" cy="9525"/>
+          </a:xfrm>
+          <a:prstGeom xmlns:a="http://schemas.openxmlformats.org/drawingml/2006/main" prst="rect">
             <a:avLst/>
           </a:prstGeom>
           <a:solidFill xmlns:a="http://schemas.openxmlformats.org/drawingml/2006/main">
-            <a:srgbClr val="2C6E73"/>
+            <a:srgbClr val="D9E0E6"/>
           </a:solidFill>
           <a:ln xmlns:a="http://schemas.openxmlformats.org/drawingml/2006/main" w="0">
-            <a:noFill/>
+            <a:solidFill>
+              <a:srgbClr val="D9E0E6"/>
+            </a:solidFill>
           </a:ln>
         </p:spPr>
       </p:sp>
@@ -8729,19 +8737,19 @@
           <p:cNvPr id="21" name="">
             <a:extLst xmlns:a="http://schemas.openxmlformats.org/drawingml/2006/main">
               <a:ext uri="{FF2B5EF4-FFF2-40B4-BE49-F238E27FC236}">
-                <a16:creationId xmlns:a16="http://schemas.microsoft.com/office/drawing/2014/main" id="{24334036-A3BC-40B4-BFC9-BD67B20C67C0}"/>
-              </a:ext>
-            </a:extLst>
-          </p:cNvPr>
-          <p:cNvSpPr>
-            <a:spLocks xmlns:a="http://schemas.openxmlformats.org/drawingml/2006/main" noGrp="1"/>
-          </p:cNvSpPr>
-          <p:nvPr/>
-        </p:nvSpPr>
-        <p:spPr>
-          <a:xfrm xmlns:a="http://schemas.openxmlformats.org/drawingml/2006/main">
-            <a:off x="1000125" y="4505325"/>
-            <a:ext cx="476250" cy="419100"/>
+                <a16:creationId xmlns:a16="http://schemas.microsoft.com/office/drawing/2014/main" id="{2286664A-09E1-4B11-9151-A4C9237EAF2D}"/>
+              </a:ext>
+            </a:extLst>
+          </p:cNvPr>
+          <p:cNvSpPr>
+            <a:spLocks xmlns:a="http://schemas.openxmlformats.org/drawingml/2006/main" noGrp="1"/>
+          </p:cNvSpPr>
+          <p:nvPr/>
+        </p:nvSpPr>
+        <p:spPr>
+          <a:xfrm xmlns:a="http://schemas.openxmlformats.org/drawingml/2006/main">
+            <a:off x="1162050" y="4314825"/>
+            <a:ext cx="400050" cy="400050"/>
           </a:xfrm>
           <a:prstGeom xmlns:a="http://schemas.openxmlformats.org/drawingml/2006/main" prst="rect">
             <a:avLst/>
@@ -8758,9 +8766,9 @@
           <a:lstStyle xmlns:a="http://schemas.openxmlformats.org/drawingml/2006/main"/>
           <a:p xmlns:a="http://schemas.openxmlformats.org/drawingml/2006/main">
             <a:pPr algn="ctr">
-              <a:defRPr sz="1350" b="1">
-                <a:solidFill>
-                  <a:srgbClr val="FFFFFF"/>
+              <a:defRPr sz="1125" b="1">
+                <a:solidFill>
+                  <a:srgbClr val="2C6E73"/>
                 </a:solidFill>
                 <a:latin typeface="Arial"/>
                 <a:ea typeface="Arial"/>
@@ -8768,9 +8776,9 @@
               </a:defRPr>
             </a:pPr>
             <a:r>
-              <a:rPr sz="1350" b="1">
-                <a:solidFill>
-                  <a:srgbClr val="FFFFFF"/>
+              <a:rPr sz="1125" b="1">
+                <a:solidFill>
+                  <a:srgbClr val="2C6E73"/>
                 </a:solidFill>
                 <a:latin typeface="Arial"/>
                 <a:ea typeface="Arial"/>
@@ -8786,19 +8794,19 @@
           <p:cNvPr id="22" name="">
             <a:extLst xmlns:a="http://schemas.openxmlformats.org/drawingml/2006/main">
               <a:ext uri="{FF2B5EF4-FFF2-40B4-BE49-F238E27FC236}">
-                <a16:creationId xmlns:a16="http://schemas.microsoft.com/office/drawing/2014/main" id="{D0171860-50DF-48EA-8E02-07F6F752D2F3}"/>
-              </a:ext>
-            </a:extLst>
-          </p:cNvPr>
-          <p:cNvSpPr>
-            <a:spLocks xmlns:a="http://schemas.openxmlformats.org/drawingml/2006/main" noGrp="1"/>
-          </p:cNvSpPr>
-          <p:nvPr/>
-        </p:nvSpPr>
-        <p:spPr>
-          <a:xfrm xmlns:a="http://schemas.openxmlformats.org/drawingml/2006/main">
-            <a:off x="1714500" y="4410075"/>
-            <a:ext cx="9429750" cy="609600"/>
+                <a16:creationId xmlns:a16="http://schemas.microsoft.com/office/drawing/2014/main" id="{7FF2817D-9D02-4125-97D5-6581C20BBC3A}"/>
+              </a:ext>
+            </a:extLst>
+          </p:cNvPr>
+          <p:cNvSpPr>
+            <a:spLocks xmlns:a="http://schemas.openxmlformats.org/drawingml/2006/main" noGrp="1"/>
+          </p:cNvSpPr>
+          <p:nvPr/>
+        </p:nvSpPr>
+        <p:spPr>
+          <a:xfrm xmlns:a="http://schemas.openxmlformats.org/drawingml/2006/main">
+            <a:off x="1714500" y="4229100"/>
+            <a:ext cx="9525000" cy="638175"/>
           </a:xfrm>
           <a:prstGeom xmlns:a="http://schemas.openxmlformats.org/drawingml/2006/main" prst="rect">
             <a:avLst/>
@@ -8815,9 +8823,9 @@
           <a:lstStyle xmlns:a="http://schemas.openxmlformats.org/drawingml/2006/main"/>
           <a:p xmlns:a="http://schemas.openxmlformats.org/drawingml/2006/main">
             <a:pPr algn="l">
-              <a:defRPr sz="1500" b="1">
-                <a:solidFill>
-                  <a:srgbClr val="2F785D"/>
+              <a:defRPr sz="1575" b="0">
+                <a:solidFill>
+                  <a:srgbClr val="17253A"/>
                 </a:solidFill>
                 <a:latin typeface="Arial"/>
                 <a:ea typeface="Arial"/>
@@ -8825,15 +8833,161 @@
               </a:defRPr>
             </a:pPr>
             <a:r>
-              <a:rPr sz="1500" b="1">
+              <a:rPr sz="1575" b="0">
+                <a:solidFill>
+                  <a:srgbClr val="17253A"/>
+                </a:solidFill>
+                <a:latin typeface="Arial"/>
+                <a:ea typeface="Arial"/>
+                <a:cs typeface="Arial"/>
+              </a:rPr>
+              <a:t>5 parts = 5 × 6</a:t>
+            </a:r>
+          </a:p>
+        </p:txBody>
+      </p:sp>
+      <p:sp>
+        <p:nvSpPr>
+          <p:cNvPr id="23" name="">
+            <a:extLst xmlns:a="http://schemas.openxmlformats.org/drawingml/2006/main">
+              <a:ext uri="{FF2B5EF4-FFF2-40B4-BE49-F238E27FC236}">
+                <a16:creationId xmlns:a16="http://schemas.microsoft.com/office/drawing/2014/main" id="{3847F8B3-66D7-4AE7-A2F0-78D54B2AFBF7}"/>
+              </a:ext>
+            </a:extLst>
+          </p:cNvPr>
+          <p:cNvSpPr>
+            <a:spLocks xmlns:a="http://schemas.openxmlformats.org/drawingml/2006/main" noGrp="1"/>
+          </p:cNvSpPr>
+          <p:nvPr/>
+        </p:nvSpPr>
+        <p:spPr>
+          <a:xfrm xmlns:a="http://schemas.openxmlformats.org/drawingml/2006/main">
+            <a:off x="1714500" y="4886325"/>
+            <a:ext cx="9334500" cy="9525"/>
+          </a:xfrm>
+          <a:prstGeom xmlns:a="http://schemas.openxmlformats.org/drawingml/2006/main" prst="rect">
+            <a:avLst/>
+          </a:prstGeom>
+          <a:solidFill xmlns:a="http://schemas.openxmlformats.org/drawingml/2006/main">
+            <a:srgbClr val="D9E0E6"/>
+          </a:solidFill>
+          <a:ln xmlns:a="http://schemas.openxmlformats.org/drawingml/2006/main" w="0">
+            <a:solidFill>
+              <a:srgbClr val="D9E0E6"/>
+            </a:solidFill>
+          </a:ln>
+        </p:spPr>
+      </p:sp>
+      <p:sp>
+        <p:nvSpPr>
+          <p:cNvPr id="24" name="">
+            <a:extLst xmlns:a="http://schemas.openxmlformats.org/drawingml/2006/main">
+              <a:ext uri="{FF2B5EF4-FFF2-40B4-BE49-F238E27FC236}">
+                <a16:creationId xmlns:a16="http://schemas.microsoft.com/office/drawing/2014/main" id="{8E68B107-EE06-4F17-978E-22BD9BCEE8D8}"/>
+              </a:ext>
+            </a:extLst>
+          </p:cNvPr>
+          <p:cNvSpPr>
+            <a:spLocks xmlns:a="http://schemas.openxmlformats.org/drawingml/2006/main" noGrp="1"/>
+          </p:cNvSpPr>
+          <p:nvPr/>
+        </p:nvSpPr>
+        <p:spPr>
+          <a:xfrm xmlns:a="http://schemas.openxmlformats.org/drawingml/2006/main">
+            <a:off x="1162050" y="5019675"/>
+            <a:ext cx="400050" cy="400050"/>
+          </a:xfrm>
+          <a:prstGeom xmlns:a="http://schemas.openxmlformats.org/drawingml/2006/main" prst="rect">
+            <a:avLst/>
+          </a:prstGeom>
+          <a:noFill xmlns:a="http://schemas.openxmlformats.org/drawingml/2006/main"/>
+          <a:ln xmlns:a="http://schemas.openxmlformats.org/drawingml/2006/main" w="0">
+            <a:noFill/>
+          </a:ln>
+        </p:spPr>
+        <p:txBody>
+          <a:bodyPr xmlns:a="http://schemas.openxmlformats.org/drawingml/2006/main" anchor="ctr">
+            <a:normAutofit fontScale="100000"/>
+          </a:bodyPr>
+          <a:lstStyle xmlns:a="http://schemas.openxmlformats.org/drawingml/2006/main"/>
+          <a:p xmlns:a="http://schemas.openxmlformats.org/drawingml/2006/main">
+            <a:pPr algn="ctr">
+              <a:defRPr sz="1125" b="1">
                 <a:solidFill>
                   <a:srgbClr val="2F785D"/>
                 </a:solidFill>
                 <a:latin typeface="Arial"/>
                 <a:ea typeface="Arial"/>
                 <a:cs typeface="Arial"/>
+              </a:defRPr>
+            </a:pPr>
+            <a:r>
+              <a:rPr sz="1125" b="1">
+                <a:solidFill>
+                  <a:srgbClr val="2F785D"/>
+                </a:solidFill>
+                <a:latin typeface="Arial"/>
+                <a:ea typeface="Arial"/>
+                <a:cs typeface="Arial"/>
               </a:rPr>
-              <a:t>Check the result: Check the relationship using a table, bar or sentence.</a:t>
+              <a:t>5</a:t>
+            </a:r>
+          </a:p>
+        </p:txBody>
+      </p:sp>
+      <p:sp>
+        <p:nvSpPr>
+          <p:cNvPr id="25" name="">
+            <a:extLst xmlns:a="http://schemas.openxmlformats.org/drawingml/2006/main">
+              <a:ext uri="{FF2B5EF4-FFF2-40B4-BE49-F238E27FC236}">
+                <a16:creationId xmlns:a16="http://schemas.microsoft.com/office/drawing/2014/main" id="{5C4D9E3E-499E-4CE2-9F53-07A3388CBA6F}"/>
+              </a:ext>
+            </a:extLst>
+          </p:cNvPr>
+          <p:cNvSpPr>
+            <a:spLocks xmlns:a="http://schemas.openxmlformats.org/drawingml/2006/main" noGrp="1"/>
+          </p:cNvSpPr>
+          <p:nvPr/>
+        </p:nvSpPr>
+        <p:spPr>
+          <a:xfrm xmlns:a="http://schemas.openxmlformats.org/drawingml/2006/main">
+            <a:off x="1714500" y="4933950"/>
+            <a:ext cx="9525000" cy="638175"/>
+          </a:xfrm>
+          <a:prstGeom xmlns:a="http://schemas.openxmlformats.org/drawingml/2006/main" prst="rect">
+            <a:avLst/>
+          </a:prstGeom>
+          <a:noFill xmlns:a="http://schemas.openxmlformats.org/drawingml/2006/main"/>
+          <a:ln xmlns:a="http://schemas.openxmlformats.org/drawingml/2006/main" w="0">
+            <a:noFill/>
+          </a:ln>
+        </p:spPr>
+        <p:txBody>
+          <a:bodyPr xmlns:a="http://schemas.openxmlformats.org/drawingml/2006/main" anchor="ctr">
+            <a:normAutofit fontScale="100000"/>
+          </a:bodyPr>
+          <a:lstStyle xmlns:a="http://schemas.openxmlformats.org/drawingml/2006/main"/>
+          <a:p xmlns:a="http://schemas.openxmlformats.org/drawingml/2006/main">
+            <a:pPr algn="l">
+              <a:defRPr sz="1575" b="1">
+                <a:solidFill>
+                  <a:srgbClr val="2F785D"/>
+                </a:solidFill>
+                <a:latin typeface="Arial"/>
+                <a:ea typeface="Arial"/>
+                <a:cs typeface="Arial"/>
+              </a:defRPr>
+            </a:pPr>
+            <a:r>
+              <a:rPr sz="1575" b="1">
+                <a:solidFill>
+                  <a:srgbClr val="2F785D"/>
+                </a:solidFill>
+                <a:latin typeface="Arial"/>
+                <a:ea typeface="Arial"/>
+                <a:cs typeface="Arial"/>
+              </a:rPr>
+              <a:t>30 ml white</a:t>
             </a:r>
           </a:p>
         </p:txBody>
@@ -8841,7 +8995,7 @@
     </p:spTree>
     <p:extLst>
       <p:ext uri="{BB962C8B-B14F-4D97-AF65-F5344CB8AC3E}">
-        <p14:creationId xmlns:p14="http://schemas.microsoft.com/office/powerpoint/2010/main" val="533439656"/>
+        <p14:creationId xmlns:p14="http://schemas.microsoft.com/office/powerpoint/2010/main" val="1433287395"/>
       </p:ext>
     </p:extLst>
   </p:cSld>
@@ -9078,6 +9232,51 @@
                       </p:childTnLst>
                     </p:cTn>
                   </p:par>
+                  <p:par>
+                    <p:cTn id="23" fill="hold">
+                      <p:stCondLst>
+                        <p:cond delay="indefinite"/>
+                      </p:stCondLst>
+                      <p:childTnLst>
+                        <p:par>
+                          <p:cTn id="24" fill="hold">
+                            <p:stCondLst>
+                              <p:cond delay="0"/>
+                            </p:stCondLst>
+                            <p:childTnLst>
+                              <p:par>
+                                <p:cTn id="25" presetID="1" presetClass="entr" presetSubtype="0" fill="hold" grpId="0" nodeType="clickEffect">
+                                  <p:stCondLst>
+                                    <p:cond delay="0"/>
+                                  </p:stCondLst>
+                                  <p:childTnLst>
+                                    <p:set>
+                                      <p:cBhvr>
+                                        <p:cTn id="26" dur="1" fill="hold">
+                                          <p:stCondLst>
+                                            <p:cond delay="0"/>
+                                          </p:stCondLst>
+                                        </p:cTn>
+                                        <p:tgtEl>
+                                          <p:spTgt spid="25"/>
+                                        </p:tgtEl>
+                                        <p:attrNameLst>
+                                          <p:attrName>style.visibility</p:attrName>
+                                        </p:attrNameLst>
+                                      </p:cBhvr>
+                                      <p:to>
+                                        <p:strVal val="visible"/>
+                                      </p:to>
+                                    </p:set>
+                                  </p:childTnLst>
+                                </p:cTn>
+                              </p:par>
+                            </p:childTnLst>
+                          </p:cTn>
+                        </p:par>
+                      </p:childTnLst>
+                    </p:cTn>
+                  </p:par>
                 </p:childTnLst>
               </p:cTn>
               <p:prevCondLst>
@@ -9105,6 +9304,7 @@
       <p:bldP spid="16" grpId="0"/>
       <p:bldP spid="19" grpId="0"/>
       <p:bldP spid="22" grpId="0"/>
+      <p:bldP spid="25" grpId="0"/>
     </p:bldLst>
   </p:timing>
 </p:sld>
@@ -9134,7 +9334,7 @@
           <p:cNvPr id="15" name="">
             <a:extLst xmlns:a="http://schemas.openxmlformats.org/drawingml/2006/main">
               <a:ext uri="{FF2B5EF4-FFF2-40B4-BE49-F238E27FC236}">
-                <a16:creationId xmlns:a16="http://schemas.microsoft.com/office/drawing/2014/main" id="{981788EC-BDE8-4876-82B2-0137C61C4068}"/>
+                <a16:creationId xmlns:a16="http://schemas.microsoft.com/office/drawing/2014/main" id="{71D407BA-9705-4E4A-96BC-83F214DDA134}"/>
               </a:ext>
             </a:extLst>
           </p:cNvPr>
@@ -9166,7 +9366,7 @@
           <p:cNvPr id="2" name="">
             <a:extLst xmlns:a="http://schemas.openxmlformats.org/drawingml/2006/main">
               <a:ext uri="{FF2B5EF4-FFF2-40B4-BE49-F238E27FC236}">
-                <a16:creationId xmlns:a16="http://schemas.microsoft.com/office/drawing/2014/main" id="{CA86C9EB-999F-47D1-BF76-D96B2438D058}"/>
+                <a16:creationId xmlns:a16="http://schemas.microsoft.com/office/drawing/2014/main" id="{2B237E64-7269-4E1B-9E32-4CC6586F5991}"/>
               </a:ext>
             </a:extLst>
           </p:cNvPr>
@@ -9223,7 +9423,7 @@
           <p:cNvPr id="3" name="">
             <a:extLst xmlns:a="http://schemas.openxmlformats.org/drawingml/2006/main">
               <a:ext uri="{FF2B5EF4-FFF2-40B4-BE49-F238E27FC236}">
-                <a16:creationId xmlns:a16="http://schemas.microsoft.com/office/drawing/2014/main" id="{0FE874FE-B8D3-49F0-B4CE-8B79C9312F0C}"/>
+                <a16:creationId xmlns:a16="http://schemas.microsoft.com/office/drawing/2014/main" id="{8D9F63F1-53FF-42A5-BDBB-3437736EDF07}"/>
               </a:ext>
             </a:extLst>
           </p:cNvPr>
@@ -9255,7 +9455,7 @@
           <p:cNvPr id="4" name="">
             <a:extLst xmlns:a="http://schemas.openxmlformats.org/drawingml/2006/main">
               <a:ext uri="{FF2B5EF4-FFF2-40B4-BE49-F238E27FC236}">
-                <a16:creationId xmlns:a16="http://schemas.microsoft.com/office/drawing/2014/main" id="{DB759B0A-EFA4-4B46-B5D3-E1809246C764}"/>
+                <a16:creationId xmlns:a16="http://schemas.microsoft.com/office/drawing/2014/main" id="{1F8C0BF3-4D14-4F57-8A6E-33A3ED45C6B8}"/>
               </a:ext>
             </a:extLst>
           </p:cNvPr>
@@ -9312,7 +9512,7 @@
           <p:cNvPr id="5" name="">
             <a:extLst xmlns:a="http://schemas.openxmlformats.org/drawingml/2006/main">
               <a:ext uri="{FF2B5EF4-FFF2-40B4-BE49-F238E27FC236}">
-                <a16:creationId xmlns:a16="http://schemas.microsoft.com/office/drawing/2014/main" id="{2CBDA299-FF26-4CBF-81E0-79F66C2C5151}"/>
+                <a16:creationId xmlns:a16="http://schemas.microsoft.com/office/drawing/2014/main" id="{79384EB9-68C5-4702-A907-27D6D9C71A79}"/>
               </a:ext>
             </a:extLst>
           </p:cNvPr>
@@ -9369,7 +9569,7 @@
           <p:cNvPr id="6" name="">
             <a:extLst xmlns:a="http://schemas.openxmlformats.org/drawingml/2006/main">
               <a:ext uri="{FF2B5EF4-FFF2-40B4-BE49-F238E27FC236}">
-                <a16:creationId xmlns:a16="http://schemas.microsoft.com/office/drawing/2014/main" id="{E9A1E5AA-4302-420F-9B16-92432C962300}"/>
+                <a16:creationId xmlns:a16="http://schemas.microsoft.com/office/drawing/2014/main" id="{517F03CF-A5A9-4165-A39C-43A5A4B5069E}"/>
               </a:ext>
             </a:extLst>
           </p:cNvPr>
@@ -9426,7 +9626,7 @@
           <p:cNvPr id="7" name="">
             <a:extLst xmlns:a="http://schemas.openxmlformats.org/drawingml/2006/main">
               <a:ext uri="{FF2B5EF4-FFF2-40B4-BE49-F238E27FC236}">
-                <a16:creationId xmlns:a16="http://schemas.microsoft.com/office/drawing/2014/main" id="{E1924732-05F7-4B1B-9956-B04149E4A8EB}"/>
+                <a16:creationId xmlns:a16="http://schemas.microsoft.com/office/drawing/2014/main" id="{BA734B99-EECC-4C8B-9869-49B630D7194D}"/>
               </a:ext>
             </a:extLst>
           </p:cNvPr>
@@ -9458,7 +9658,7 @@
           <p:cNvPr id="8" name="">
             <a:extLst xmlns:a="http://schemas.openxmlformats.org/drawingml/2006/main">
               <a:ext uri="{FF2B5EF4-FFF2-40B4-BE49-F238E27FC236}">
-                <a16:creationId xmlns:a16="http://schemas.microsoft.com/office/drawing/2014/main" id="{13459899-C375-496D-9D38-9180B3A17509}"/>
+                <a16:creationId xmlns:a16="http://schemas.microsoft.com/office/drawing/2014/main" id="{22A3E8A9-0AC7-44EF-9F63-1A25270A5A6C}"/>
               </a:ext>
             </a:extLst>
           </p:cNvPr>
@@ -9515,7 +9715,7 @@
           <p:cNvPr id="9" name="">
             <a:extLst xmlns:a="http://schemas.openxmlformats.org/drawingml/2006/main">
               <a:ext uri="{FF2B5EF4-FFF2-40B4-BE49-F238E27FC236}">
-                <a16:creationId xmlns:a16="http://schemas.microsoft.com/office/drawing/2014/main" id="{46FF6DE8-55DE-4A68-AD69-E20F7B52D5DB}"/>
+                <a16:creationId xmlns:a16="http://schemas.microsoft.com/office/drawing/2014/main" id="{80F27DE9-60C8-42DF-A0D1-F40018EE4F20}"/>
               </a:ext>
             </a:extLst>
           </p:cNvPr>
@@ -9572,7 +9772,7 @@
           <p:cNvPr id="10" name="">
             <a:extLst xmlns:a="http://schemas.openxmlformats.org/drawingml/2006/main">
               <a:ext uri="{FF2B5EF4-FFF2-40B4-BE49-F238E27FC236}">
-                <a16:creationId xmlns:a16="http://schemas.microsoft.com/office/drawing/2014/main" id="{A544C520-EB36-4362-8F8B-9964EC31A66F}"/>
+                <a16:creationId xmlns:a16="http://schemas.microsoft.com/office/drawing/2014/main" id="{A77676D8-AF0D-42C5-9653-229B9EFF09F9}"/>
               </a:ext>
             </a:extLst>
           </p:cNvPr>
@@ -9629,7 +9829,7 @@
           <p:cNvPr id="11" name="">
             <a:extLst xmlns:a="http://schemas.openxmlformats.org/drawingml/2006/main">
               <a:ext uri="{FF2B5EF4-FFF2-40B4-BE49-F238E27FC236}">
-                <a16:creationId xmlns:a16="http://schemas.microsoft.com/office/drawing/2014/main" id="{968BD6B9-1FF3-47F9-9CA9-D209E9F383B6}"/>
+                <a16:creationId xmlns:a16="http://schemas.microsoft.com/office/drawing/2014/main" id="{7F9F0C7C-B5AA-4908-B199-6C6503EF21D2}"/>
               </a:ext>
             </a:extLst>
           </p:cNvPr>
@@ -9686,7 +9886,7 @@
           <p:cNvPr id="12" name="">
             <a:extLst xmlns:a="http://schemas.openxmlformats.org/drawingml/2006/main">
               <a:ext uri="{FF2B5EF4-FFF2-40B4-BE49-F238E27FC236}">
-                <a16:creationId xmlns:a16="http://schemas.microsoft.com/office/drawing/2014/main" id="{B913BB95-A003-4EC6-BF57-1E0B97A55F1A}"/>
+                <a16:creationId xmlns:a16="http://schemas.microsoft.com/office/drawing/2014/main" id="{FD4BC0A2-764E-4323-A38D-D9E4EBD85ADD}"/>
               </a:ext>
             </a:extLst>
           </p:cNvPr>
@@ -9718,7 +9918,7 @@
           <p:cNvPr id="13" name="">
             <a:extLst xmlns:a="http://schemas.openxmlformats.org/drawingml/2006/main">
               <a:ext uri="{FF2B5EF4-FFF2-40B4-BE49-F238E27FC236}">
-                <a16:creationId xmlns:a16="http://schemas.microsoft.com/office/drawing/2014/main" id="{1BD5D6EF-4E75-481F-9B79-6F634B99F870}"/>
+                <a16:creationId xmlns:a16="http://schemas.microsoft.com/office/drawing/2014/main" id="{0CA5AC51-CE4A-442F-99B2-43C0BB33C2A9}"/>
               </a:ext>
             </a:extLst>
           </p:cNvPr>
@@ -9775,7 +9975,7 @@
           <p:cNvPr id="14" name="">
             <a:extLst xmlns:a="http://schemas.openxmlformats.org/drawingml/2006/main">
               <a:ext uri="{FF2B5EF4-FFF2-40B4-BE49-F238E27FC236}">
-                <a16:creationId xmlns:a16="http://schemas.microsoft.com/office/drawing/2014/main" id="{1BAF6AEF-DF03-4E02-AE0A-B3A9148D211B}"/>
+                <a16:creationId xmlns:a16="http://schemas.microsoft.com/office/drawing/2014/main" id="{8EF19906-0EF7-4FF5-B620-F769B3E67B41}"/>
               </a:ext>
             </a:extLst>
           </p:cNvPr>
@@ -9830,7 +10030,7 @@
     </p:spTree>
     <p:extLst>
       <p:ext uri="{BB962C8B-B14F-4D97-AF65-F5344CB8AC3E}">
-        <p14:creationId xmlns:p14="http://schemas.microsoft.com/office/powerpoint/2010/main" val="1059074583"/>
+        <p14:creationId xmlns:p14="http://schemas.microsoft.com/office/powerpoint/2010/main" val="514389459"/>
       </p:ext>
     </p:extLst>
   </p:cSld>
@@ -10031,7 +10231,7 @@
           <p:cNvPr id="16" name="">
             <a:extLst xmlns:a="http://schemas.openxmlformats.org/drawingml/2006/main">
               <a:ext uri="{FF2B5EF4-FFF2-40B4-BE49-F238E27FC236}">
-                <a16:creationId xmlns:a16="http://schemas.microsoft.com/office/drawing/2014/main" id="{EA9670B7-9DA1-4A06-8207-DB3034D2499A}"/>
+                <a16:creationId xmlns:a16="http://schemas.microsoft.com/office/drawing/2014/main" id="{11A0D4C4-950D-4703-84CD-A5590C5FEEBD}"/>
               </a:ext>
             </a:extLst>
           </p:cNvPr>
@@ -10063,7 +10263,7 @@
           <p:cNvPr id="2" name="">
             <a:extLst xmlns:a="http://schemas.openxmlformats.org/drawingml/2006/main">
               <a:ext uri="{FF2B5EF4-FFF2-40B4-BE49-F238E27FC236}">
-                <a16:creationId xmlns:a16="http://schemas.microsoft.com/office/drawing/2014/main" id="{2C2A7ED5-639C-43DB-834F-6D0906608AF1}"/>
+                <a16:creationId xmlns:a16="http://schemas.microsoft.com/office/drawing/2014/main" id="{2EBDD16E-79ED-4E46-87AB-08B50E88DD0B}"/>
               </a:ext>
             </a:extLst>
           </p:cNvPr>
@@ -10120,7 +10320,7 @@
           <p:cNvPr id="3" name="">
             <a:extLst xmlns:a="http://schemas.openxmlformats.org/drawingml/2006/main">
               <a:ext uri="{FF2B5EF4-FFF2-40B4-BE49-F238E27FC236}">
-                <a16:creationId xmlns:a16="http://schemas.microsoft.com/office/drawing/2014/main" id="{5B4FB156-3531-458A-9EBF-9A3424B7F313}"/>
+                <a16:creationId xmlns:a16="http://schemas.microsoft.com/office/drawing/2014/main" id="{38221FC8-EF72-49FE-A5A0-7F64ED10661D}"/>
               </a:ext>
             </a:extLst>
           </p:cNvPr>
@@ -10152,7 +10352,7 @@
           <p:cNvPr id="4" name="">
             <a:extLst xmlns:a="http://schemas.openxmlformats.org/drawingml/2006/main">
               <a:ext uri="{FF2B5EF4-FFF2-40B4-BE49-F238E27FC236}">
-                <a16:creationId xmlns:a16="http://schemas.microsoft.com/office/drawing/2014/main" id="{1BB01B3A-90E6-464D-83DD-118A0223F63F}"/>
+                <a16:creationId xmlns:a16="http://schemas.microsoft.com/office/drawing/2014/main" id="{58D7BD1E-FAA0-4A32-8EAF-0AC4B34C5224}"/>
               </a:ext>
             </a:extLst>
           </p:cNvPr>
@@ -10209,7 +10409,7 @@
           <p:cNvPr id="5" name="">
             <a:extLst xmlns:a="http://schemas.openxmlformats.org/drawingml/2006/main">
               <a:ext uri="{FF2B5EF4-FFF2-40B4-BE49-F238E27FC236}">
-                <a16:creationId xmlns:a16="http://schemas.microsoft.com/office/drawing/2014/main" id="{0E2FD66D-DCA9-4F20-B91A-E04B529EE66C}"/>
+                <a16:creationId xmlns:a16="http://schemas.microsoft.com/office/drawing/2014/main" id="{1D638D91-08B2-41A5-8DF8-C366AE8B9FED}"/>
               </a:ext>
             </a:extLst>
           </p:cNvPr>
@@ -10266,7 +10466,7 @@
           <p:cNvPr id="6" name="">
             <a:extLst xmlns:a="http://schemas.openxmlformats.org/drawingml/2006/main">
               <a:ext uri="{FF2B5EF4-FFF2-40B4-BE49-F238E27FC236}">
-                <a16:creationId xmlns:a16="http://schemas.microsoft.com/office/drawing/2014/main" id="{7B3FA0D8-3859-4C80-BBD0-D209449D5B37}"/>
+                <a16:creationId xmlns:a16="http://schemas.microsoft.com/office/drawing/2014/main" id="{AE7B4CEB-1BAA-4D8A-B9A4-FED02E9E15D8}"/>
               </a:ext>
             </a:extLst>
           </p:cNvPr>
@@ -10323,7 +10523,7 @@
           <p:cNvPr id="7" name="">
             <a:extLst xmlns:a="http://schemas.openxmlformats.org/drawingml/2006/main">
               <a:ext uri="{FF2B5EF4-FFF2-40B4-BE49-F238E27FC236}">
-                <a16:creationId xmlns:a16="http://schemas.microsoft.com/office/drawing/2014/main" id="{5F4DF9E3-2D84-442B-9B2E-CC7D158A0423}"/>
+                <a16:creationId xmlns:a16="http://schemas.microsoft.com/office/drawing/2014/main" id="{9EFAC715-CEF0-40A5-A854-70AABA76CCEE}"/>
               </a:ext>
             </a:extLst>
           </p:cNvPr>
@@ -10355,7 +10555,7 @@
           <p:cNvPr id="8" name="">
             <a:extLst xmlns:a="http://schemas.openxmlformats.org/drawingml/2006/main">
               <a:ext uri="{FF2B5EF4-FFF2-40B4-BE49-F238E27FC236}">
-                <a16:creationId xmlns:a16="http://schemas.microsoft.com/office/drawing/2014/main" id="{73CCC1F6-95EA-45ED-927C-9CA3F0B2765D}"/>
+                <a16:creationId xmlns:a16="http://schemas.microsoft.com/office/drawing/2014/main" id="{67C7A1A6-0D9F-4735-A73D-FC725E08791F}"/>
               </a:ext>
             </a:extLst>
           </p:cNvPr>
@@ -10412,7 +10612,7 @@
           <p:cNvPr id="9" name="">
             <a:extLst xmlns:a="http://schemas.openxmlformats.org/drawingml/2006/main">
               <a:ext uri="{FF2B5EF4-FFF2-40B4-BE49-F238E27FC236}">
-                <a16:creationId xmlns:a16="http://schemas.microsoft.com/office/drawing/2014/main" id="{F26FE9F8-7F67-48A3-A139-1E2FE7771B30}"/>
+                <a16:creationId xmlns:a16="http://schemas.microsoft.com/office/drawing/2014/main" id="{D33906AA-53D6-4E41-8F0E-03C819CED207}"/>
               </a:ext>
             </a:extLst>
           </p:cNvPr>
@@ -10469,7 +10669,7 @@
           <p:cNvPr id="10" name="">
             <a:extLst xmlns:a="http://schemas.openxmlformats.org/drawingml/2006/main">
               <a:ext uri="{FF2B5EF4-FFF2-40B4-BE49-F238E27FC236}">
-                <a16:creationId xmlns:a16="http://schemas.microsoft.com/office/drawing/2014/main" id="{EDFB02F7-AA0B-4E39-A532-4458FA932250}"/>
+                <a16:creationId xmlns:a16="http://schemas.microsoft.com/office/drawing/2014/main" id="{1DB7C0C6-FECB-4790-9E9A-883E4AF1B6E0}"/>
               </a:ext>
             </a:extLst>
           </p:cNvPr>
@@ -10526,7 +10726,7 @@
           <p:cNvPr id="11" name="">
             <a:extLst xmlns:a="http://schemas.openxmlformats.org/drawingml/2006/main">
               <a:ext uri="{FF2B5EF4-FFF2-40B4-BE49-F238E27FC236}">
-                <a16:creationId xmlns:a16="http://schemas.microsoft.com/office/drawing/2014/main" id="{80D3BAFA-8884-4420-B7E4-D3EBD9A61B58}"/>
+                <a16:creationId xmlns:a16="http://schemas.microsoft.com/office/drawing/2014/main" id="{756DD8C4-E2FD-41A0-860B-867388C33270}"/>
               </a:ext>
             </a:extLst>
           </p:cNvPr>
@@ -10583,7 +10783,7 @@
           <p:cNvPr id="12" name="">
             <a:extLst xmlns:a="http://schemas.openxmlformats.org/drawingml/2006/main">
               <a:ext uri="{FF2B5EF4-FFF2-40B4-BE49-F238E27FC236}">
-                <a16:creationId xmlns:a16="http://schemas.microsoft.com/office/drawing/2014/main" id="{0753F995-5636-49D2-8D4F-CF70E69E66D5}"/>
+                <a16:creationId xmlns:a16="http://schemas.microsoft.com/office/drawing/2014/main" id="{6193DCE1-7D7B-4A72-86C6-F2726AD5215C}"/>
               </a:ext>
             </a:extLst>
           </p:cNvPr>
@@ -10640,7 +10840,7 @@
           <p:cNvPr id="13" name="">
             <a:extLst xmlns:a="http://schemas.openxmlformats.org/drawingml/2006/main">
               <a:ext uri="{FF2B5EF4-FFF2-40B4-BE49-F238E27FC236}">
-                <a16:creationId xmlns:a16="http://schemas.microsoft.com/office/drawing/2014/main" id="{B3D4062E-2637-404D-9B5E-EF3D80740D5B}"/>
+                <a16:creationId xmlns:a16="http://schemas.microsoft.com/office/drawing/2014/main" id="{8CC8A4AA-8934-411A-A2DD-4AE449605AAC}"/>
               </a:ext>
             </a:extLst>
           </p:cNvPr>
@@ -10697,7 +10897,7 @@
           <p:cNvPr id="14" name="">
             <a:extLst xmlns:a="http://schemas.openxmlformats.org/drawingml/2006/main">
               <a:ext uri="{FF2B5EF4-FFF2-40B4-BE49-F238E27FC236}">
-                <a16:creationId xmlns:a16="http://schemas.microsoft.com/office/drawing/2014/main" id="{293FBD7C-0F52-4366-A0A2-539B21B1069F}"/>
+                <a16:creationId xmlns:a16="http://schemas.microsoft.com/office/drawing/2014/main" id="{02838DE9-E730-4B89-83DA-4CC6D1F0A212}"/>
               </a:ext>
             </a:extLst>
           </p:cNvPr>
@@ -10754,7 +10954,7 @@
           <p:cNvPr id="15" name="">
             <a:extLst xmlns:a="http://schemas.openxmlformats.org/drawingml/2006/main">
               <a:ext uri="{FF2B5EF4-FFF2-40B4-BE49-F238E27FC236}">
-                <a16:creationId xmlns:a16="http://schemas.microsoft.com/office/drawing/2014/main" id="{C70FA4E9-69C4-4325-A09F-BF7AEA932598}"/>
+                <a16:creationId xmlns:a16="http://schemas.microsoft.com/office/drawing/2014/main" id="{E2E1D74E-9F5B-4BC0-9AC8-7B2DE639D55D}"/>
               </a:ext>
             </a:extLst>
           </p:cNvPr>
@@ -10809,7 +11009,7 @@
     </p:spTree>
     <p:extLst>
       <p:ext uri="{BB962C8B-B14F-4D97-AF65-F5344CB8AC3E}">
-        <p14:creationId xmlns:p14="http://schemas.microsoft.com/office/powerpoint/2010/main" val="674760209"/>
+        <p14:creationId xmlns:p14="http://schemas.microsoft.com/office/powerpoint/2010/main" val="1506759203"/>
       </p:ext>
     </p:extLst>
   </p:cSld>
@@ -10964,7 +11164,7 @@
           <p:cNvPr id="16" name="">
             <a:extLst xmlns:a="http://schemas.openxmlformats.org/drawingml/2006/main">
               <a:ext uri="{FF2B5EF4-FFF2-40B4-BE49-F238E27FC236}">
-                <a16:creationId xmlns:a16="http://schemas.microsoft.com/office/drawing/2014/main" id="{8AB6F5A3-A622-449D-A5FD-6DCA785B0888}"/>
+                <a16:creationId xmlns:a16="http://schemas.microsoft.com/office/drawing/2014/main" id="{F5ED4B4A-A6EA-46A3-85ED-233CA09FAC2D}"/>
               </a:ext>
             </a:extLst>
           </p:cNvPr>
@@ -10996,7 +11196,7 @@
           <p:cNvPr id="2" name="">
             <a:extLst xmlns:a="http://schemas.openxmlformats.org/drawingml/2006/main">
               <a:ext uri="{FF2B5EF4-FFF2-40B4-BE49-F238E27FC236}">
-                <a16:creationId xmlns:a16="http://schemas.microsoft.com/office/drawing/2014/main" id="{F9E8F934-7B75-4D76-9A51-A84DE146D153}"/>
+                <a16:creationId xmlns:a16="http://schemas.microsoft.com/office/drawing/2014/main" id="{B50EE8B8-BA71-490B-9E52-CC0D2802B685}"/>
               </a:ext>
             </a:extLst>
           </p:cNvPr>
@@ -11053,7 +11253,7 @@
           <p:cNvPr id="3" name="">
             <a:extLst xmlns:a="http://schemas.openxmlformats.org/drawingml/2006/main">
               <a:ext uri="{FF2B5EF4-FFF2-40B4-BE49-F238E27FC236}">
-                <a16:creationId xmlns:a16="http://schemas.microsoft.com/office/drawing/2014/main" id="{76D12BBA-C39D-4A93-8889-362B2AAEC827}"/>
+                <a16:creationId xmlns:a16="http://schemas.microsoft.com/office/drawing/2014/main" id="{047C42D7-01F0-4699-832F-9297812A2602}"/>
               </a:ext>
             </a:extLst>
           </p:cNvPr>
@@ -11085,7 +11285,7 @@
           <p:cNvPr id="4" name="">
             <a:extLst xmlns:a="http://schemas.openxmlformats.org/drawingml/2006/main">
               <a:ext uri="{FF2B5EF4-FFF2-40B4-BE49-F238E27FC236}">
-                <a16:creationId xmlns:a16="http://schemas.microsoft.com/office/drawing/2014/main" id="{7898BCF1-161B-407A-A52C-EA8BA9D3ED3B}"/>
+                <a16:creationId xmlns:a16="http://schemas.microsoft.com/office/drawing/2014/main" id="{A7C85909-05C8-4427-B9B0-E5D9C34EA8E8}"/>
               </a:ext>
             </a:extLst>
           </p:cNvPr>
@@ -11142,7 +11342,7 @@
           <p:cNvPr id="5" name="">
             <a:extLst xmlns:a="http://schemas.openxmlformats.org/drawingml/2006/main">
               <a:ext uri="{FF2B5EF4-FFF2-40B4-BE49-F238E27FC236}">
-                <a16:creationId xmlns:a16="http://schemas.microsoft.com/office/drawing/2014/main" id="{E5918898-FB6A-43A2-94D0-C9D75D36DF40}"/>
+                <a16:creationId xmlns:a16="http://schemas.microsoft.com/office/drawing/2014/main" id="{00B9E9C9-2EDC-44D0-9C2E-6648AAB83E7F}"/>
               </a:ext>
             </a:extLst>
           </p:cNvPr>
@@ -11199,7 +11399,7 @@
           <p:cNvPr id="6" name="">
             <a:extLst xmlns:a="http://schemas.openxmlformats.org/drawingml/2006/main">
               <a:ext uri="{FF2B5EF4-FFF2-40B4-BE49-F238E27FC236}">
-                <a16:creationId xmlns:a16="http://schemas.microsoft.com/office/drawing/2014/main" id="{C0F5E3BA-9754-453B-B904-D66185E4A38E}"/>
+                <a16:creationId xmlns:a16="http://schemas.microsoft.com/office/drawing/2014/main" id="{8097F0E5-082B-4DF7-836C-66C08605BA11}"/>
               </a:ext>
             </a:extLst>
           </p:cNvPr>
@@ -11256,7 +11456,7 @@
           <p:cNvPr id="7" name="">
             <a:extLst xmlns:a="http://schemas.openxmlformats.org/drawingml/2006/main">
               <a:ext uri="{FF2B5EF4-FFF2-40B4-BE49-F238E27FC236}">
-                <a16:creationId xmlns:a16="http://schemas.microsoft.com/office/drawing/2014/main" id="{C19121D7-AC0F-4EE4-91E6-14A2A21AF25A}"/>
+                <a16:creationId xmlns:a16="http://schemas.microsoft.com/office/drawing/2014/main" id="{242830E2-DB86-426E-B6CE-8C2BF0336F50}"/>
               </a:ext>
             </a:extLst>
           </p:cNvPr>
@@ -11288,7 +11488,7 @@
           <p:cNvPr id="8" name="">
             <a:extLst xmlns:a="http://schemas.openxmlformats.org/drawingml/2006/main">
               <a:ext uri="{FF2B5EF4-FFF2-40B4-BE49-F238E27FC236}">
-                <a16:creationId xmlns:a16="http://schemas.microsoft.com/office/drawing/2014/main" id="{06DEA6DD-9340-4C48-87D7-F3836B461C0F}"/>
+                <a16:creationId xmlns:a16="http://schemas.microsoft.com/office/drawing/2014/main" id="{F54FF3E3-9EDE-4C86-839A-79CB39275186}"/>
               </a:ext>
             </a:extLst>
           </p:cNvPr>
@@ -11345,7 +11545,7 @@
           <p:cNvPr id="9" name="">
             <a:extLst xmlns:a="http://schemas.openxmlformats.org/drawingml/2006/main">
               <a:ext uri="{FF2B5EF4-FFF2-40B4-BE49-F238E27FC236}">
-                <a16:creationId xmlns:a16="http://schemas.microsoft.com/office/drawing/2014/main" id="{84333F4E-0158-4EDA-85A7-C05B8641EDA7}"/>
+                <a16:creationId xmlns:a16="http://schemas.microsoft.com/office/drawing/2014/main" id="{3CABEAEE-211F-4A0C-B273-BB93F58FC7E6}"/>
               </a:ext>
             </a:extLst>
           </p:cNvPr>
@@ -11406,7 +11606,7 @@
           <p:nvPr/>
         </p:nvPicPr>
         <p:blipFill>
-          <a:blip xmlns:r="http://schemas.openxmlformats.org/officeDocument/2006/relationships" xmlns:a="http://schemas.openxmlformats.org/drawingml/2006/main" r:embed="R8cd126f35d634fc6"/>
+          <a:blip xmlns:r="http://schemas.openxmlformats.org/officeDocument/2006/relationships" xmlns:a="http://schemas.openxmlformats.org/drawingml/2006/main" r:embed="Re358a79676ff4db1"/>
           <a:stretch xmlns:a="http://schemas.openxmlformats.org/drawingml/2006/main"/>
         </p:blipFill>
         <p:spPr>
@@ -11424,7 +11624,7 @@
           <p:cNvPr id="11" name="">
             <a:extLst xmlns:a="http://schemas.openxmlformats.org/drawingml/2006/main">
               <a:ext uri="{FF2B5EF4-FFF2-40B4-BE49-F238E27FC236}">
-                <a16:creationId xmlns:a16="http://schemas.microsoft.com/office/drawing/2014/main" id="{88A8A15D-227D-4E9D-8916-5BAE106F68C4}"/>
+                <a16:creationId xmlns:a16="http://schemas.microsoft.com/office/drawing/2014/main" id="{1E3009A7-0BC8-47AA-99B2-161B06BE208E}"/>
               </a:ext>
             </a:extLst>
           </p:cNvPr>
@@ -11481,7 +11681,7 @@
           <p:cNvPr id="12" name="">
             <a:extLst xmlns:a="http://schemas.openxmlformats.org/drawingml/2006/main">
               <a:ext uri="{FF2B5EF4-FFF2-40B4-BE49-F238E27FC236}">
-                <a16:creationId xmlns:a16="http://schemas.microsoft.com/office/drawing/2014/main" id="{F3FF0F89-F8FD-4C6D-879A-50125A4BC964}"/>
+                <a16:creationId xmlns:a16="http://schemas.microsoft.com/office/drawing/2014/main" id="{18AAC37B-6C26-4BB5-AA5B-329FF2E00F4D}"/>
               </a:ext>
             </a:extLst>
           </p:cNvPr>
@@ -11538,7 +11738,7 @@
           <p:cNvPr id="13" name="">
             <a:extLst xmlns:a="http://schemas.openxmlformats.org/drawingml/2006/main">
               <a:ext uri="{FF2B5EF4-FFF2-40B4-BE49-F238E27FC236}">
-                <a16:creationId xmlns:a16="http://schemas.microsoft.com/office/drawing/2014/main" id="{F9210530-46C0-43F9-AE3C-9EC04A4D8A56}"/>
+                <a16:creationId xmlns:a16="http://schemas.microsoft.com/office/drawing/2014/main" id="{9E1D9C9E-F08D-4528-903F-CC6440F672A1}"/>
               </a:ext>
             </a:extLst>
           </p:cNvPr>
@@ -11570,7 +11770,7 @@
           <p:cNvPr id="14" name="">
             <a:extLst xmlns:a="http://schemas.openxmlformats.org/drawingml/2006/main">
               <a:ext uri="{FF2B5EF4-FFF2-40B4-BE49-F238E27FC236}">
-                <a16:creationId xmlns:a16="http://schemas.microsoft.com/office/drawing/2014/main" id="{93D182F6-D861-415C-998E-5D2A437261A2}"/>
+                <a16:creationId xmlns:a16="http://schemas.microsoft.com/office/drawing/2014/main" id="{F8BDC2E9-8CDB-48D8-AF5D-37C9C2352CBE}"/>
               </a:ext>
             </a:extLst>
           </p:cNvPr>
@@ -11627,7 +11827,7 @@
           <p:cNvPr id="15" name="">
             <a:extLst xmlns:a="http://schemas.openxmlformats.org/drawingml/2006/main">
               <a:ext uri="{FF2B5EF4-FFF2-40B4-BE49-F238E27FC236}">
-                <a16:creationId xmlns:a16="http://schemas.microsoft.com/office/drawing/2014/main" id="{A9F28E35-B7EA-4614-A167-9D3FE990F211}"/>
+                <a16:creationId xmlns:a16="http://schemas.microsoft.com/office/drawing/2014/main" id="{31AF5DA7-4869-4D5D-A96D-3E270CBC6244}"/>
               </a:ext>
             </a:extLst>
           </p:cNvPr>
@@ -11682,7 +11882,7 @@
     </p:spTree>
     <p:extLst>
       <p:ext uri="{BB962C8B-B14F-4D97-AF65-F5344CB8AC3E}">
-        <p14:creationId xmlns:p14="http://schemas.microsoft.com/office/powerpoint/2010/main" val="1566316947"/>
+        <p14:creationId xmlns:p14="http://schemas.microsoft.com/office/powerpoint/2010/main" val="1892888686"/>
       </p:ext>
     </p:extLst>
   </p:cSld>
@@ -11837,7 +12037,7 @@
           <p:cNvPr id="23" name="">
             <a:extLst xmlns:a="http://schemas.openxmlformats.org/drawingml/2006/main">
               <a:ext uri="{FF2B5EF4-FFF2-40B4-BE49-F238E27FC236}">
-                <a16:creationId xmlns:a16="http://schemas.microsoft.com/office/drawing/2014/main" id="{AC21AC56-2A0A-4408-9224-F04B5BFD292A}"/>
+                <a16:creationId xmlns:a16="http://schemas.microsoft.com/office/drawing/2014/main" id="{91376707-8F74-4F96-BD50-62015331BD74}"/>
               </a:ext>
             </a:extLst>
           </p:cNvPr>
@@ -11869,7 +12069,7 @@
           <p:cNvPr id="2" name="">
             <a:extLst xmlns:a="http://schemas.openxmlformats.org/drawingml/2006/main">
               <a:ext uri="{FF2B5EF4-FFF2-40B4-BE49-F238E27FC236}">
-                <a16:creationId xmlns:a16="http://schemas.microsoft.com/office/drawing/2014/main" id="{6EA1D0A5-8D5B-4CC2-A08B-FD3D3A887560}"/>
+                <a16:creationId xmlns:a16="http://schemas.microsoft.com/office/drawing/2014/main" id="{73BEE8B5-95E7-4C8B-B0F9-C09A9B3E8DA7}"/>
               </a:ext>
             </a:extLst>
           </p:cNvPr>
@@ -11926,7 +12126,7 @@
           <p:cNvPr id="3" name="">
             <a:extLst xmlns:a="http://schemas.openxmlformats.org/drawingml/2006/main">
               <a:ext uri="{FF2B5EF4-FFF2-40B4-BE49-F238E27FC236}">
-                <a16:creationId xmlns:a16="http://schemas.microsoft.com/office/drawing/2014/main" id="{499A6AA6-50BE-4D76-A4A9-1EC83317AF8E}"/>
+                <a16:creationId xmlns:a16="http://schemas.microsoft.com/office/drawing/2014/main" id="{7C04CABF-8512-4633-946C-54FA7F63654C}"/>
               </a:ext>
             </a:extLst>
           </p:cNvPr>
@@ -11958,7 +12158,7 @@
           <p:cNvPr id="4" name="">
             <a:extLst xmlns:a="http://schemas.openxmlformats.org/drawingml/2006/main">
               <a:ext uri="{FF2B5EF4-FFF2-40B4-BE49-F238E27FC236}">
-                <a16:creationId xmlns:a16="http://schemas.microsoft.com/office/drawing/2014/main" id="{28EBA911-900C-4006-8A53-E282B6A6D0BE}"/>
+                <a16:creationId xmlns:a16="http://schemas.microsoft.com/office/drawing/2014/main" id="{AE11937A-A2AA-4BE8-BC88-E3EB79AEEDAB}"/>
               </a:ext>
             </a:extLst>
           </p:cNvPr>
@@ -12015,7 +12215,7 @@
           <p:cNvPr id="5" name="">
             <a:extLst xmlns:a="http://schemas.openxmlformats.org/drawingml/2006/main">
               <a:ext uri="{FF2B5EF4-FFF2-40B4-BE49-F238E27FC236}">
-                <a16:creationId xmlns:a16="http://schemas.microsoft.com/office/drawing/2014/main" id="{FAD3FB23-C3D9-4ECE-A8B8-ECB1C324AFC7}"/>
+                <a16:creationId xmlns:a16="http://schemas.microsoft.com/office/drawing/2014/main" id="{7CCF0AB8-DCEB-4BB7-B3EF-BD904A0F5799}"/>
               </a:ext>
             </a:extLst>
           </p:cNvPr>
@@ -12072,7 +12272,7 @@
           <p:cNvPr id="6" name="">
             <a:extLst xmlns:a="http://schemas.openxmlformats.org/drawingml/2006/main">
               <a:ext uri="{FF2B5EF4-FFF2-40B4-BE49-F238E27FC236}">
-                <a16:creationId xmlns:a16="http://schemas.microsoft.com/office/drawing/2014/main" id="{CD304B53-898F-4F3A-BE0D-E62CA836B941}"/>
+                <a16:creationId xmlns:a16="http://schemas.microsoft.com/office/drawing/2014/main" id="{F4894781-1258-4DAE-A114-F5D9576354D8}"/>
               </a:ext>
             </a:extLst>
           </p:cNvPr>
@@ -12129,7 +12329,7 @@
           <p:cNvPr id="7" name="">
             <a:extLst xmlns:a="http://schemas.openxmlformats.org/drawingml/2006/main">
               <a:ext uri="{FF2B5EF4-FFF2-40B4-BE49-F238E27FC236}">
-                <a16:creationId xmlns:a16="http://schemas.microsoft.com/office/drawing/2014/main" id="{81F963E5-36A2-4EC6-A02F-70B4F920B306}"/>
+                <a16:creationId xmlns:a16="http://schemas.microsoft.com/office/drawing/2014/main" id="{2C76EE2D-F9D7-4233-9A25-152141E6C9F6}"/>
               </a:ext>
             </a:extLst>
           </p:cNvPr>
@@ -12161,7 +12361,7 @@
           <p:cNvPr id="8" name="">
             <a:extLst xmlns:a="http://schemas.openxmlformats.org/drawingml/2006/main">
               <a:ext uri="{FF2B5EF4-FFF2-40B4-BE49-F238E27FC236}">
-                <a16:creationId xmlns:a16="http://schemas.microsoft.com/office/drawing/2014/main" id="{FD42E683-D09A-4836-A37A-07C6A58F5658}"/>
+                <a16:creationId xmlns:a16="http://schemas.microsoft.com/office/drawing/2014/main" id="{BD8B61D6-2473-44D2-9EB4-1B44A3792DDB}"/>
               </a:ext>
             </a:extLst>
           </p:cNvPr>
@@ -12218,7 +12418,7 @@
           <p:cNvPr id="9" name="">
             <a:extLst xmlns:a="http://schemas.openxmlformats.org/drawingml/2006/main">
               <a:ext uri="{FF2B5EF4-FFF2-40B4-BE49-F238E27FC236}">
-                <a16:creationId xmlns:a16="http://schemas.microsoft.com/office/drawing/2014/main" id="{FE577B32-1B0F-4DB3-9B7C-62B9FAE7BE17}"/>
+                <a16:creationId xmlns:a16="http://schemas.microsoft.com/office/drawing/2014/main" id="{3785A2D7-6C32-40F2-B9F1-773155D396AE}"/>
               </a:ext>
             </a:extLst>
           </p:cNvPr>
@@ -12275,7 +12475,7 @@
           <p:cNvPr id="10" name="">
             <a:extLst xmlns:a="http://schemas.openxmlformats.org/drawingml/2006/main">
               <a:ext uri="{FF2B5EF4-FFF2-40B4-BE49-F238E27FC236}">
-                <a16:creationId xmlns:a16="http://schemas.microsoft.com/office/drawing/2014/main" id="{4BFEEDB6-0594-41DA-962D-9A5FB9124593}"/>
+                <a16:creationId xmlns:a16="http://schemas.microsoft.com/office/drawing/2014/main" id="{C42B20D3-3500-40DE-BD93-FEB6DDA86AC9}"/>
               </a:ext>
             </a:extLst>
           </p:cNvPr>
@@ -12309,7 +12509,7 @@
           <p:cNvPr id="11" name="">
             <a:extLst xmlns:a="http://schemas.openxmlformats.org/drawingml/2006/main">
               <a:ext uri="{FF2B5EF4-FFF2-40B4-BE49-F238E27FC236}">
-                <a16:creationId xmlns:a16="http://schemas.microsoft.com/office/drawing/2014/main" id="{E884DEDD-543D-4E92-9755-AE85CA748499}"/>
+                <a16:creationId xmlns:a16="http://schemas.microsoft.com/office/drawing/2014/main" id="{7A619682-0A6E-4091-B2B1-B74255F49D7C}"/>
               </a:ext>
             </a:extLst>
           </p:cNvPr>
@@ -12341,7 +12541,7 @@
           <p:cNvPr id="12" name="">
             <a:extLst xmlns:a="http://schemas.openxmlformats.org/drawingml/2006/main">
               <a:ext uri="{FF2B5EF4-FFF2-40B4-BE49-F238E27FC236}">
-                <a16:creationId xmlns:a16="http://schemas.microsoft.com/office/drawing/2014/main" id="{83C4822B-633A-4905-B256-FC52A4BA0AB0}"/>
+                <a16:creationId xmlns:a16="http://schemas.microsoft.com/office/drawing/2014/main" id="{BE43AFFE-03DA-4F7E-8119-4C8C9C8BE705}"/>
               </a:ext>
             </a:extLst>
           </p:cNvPr>
@@ -12398,7 +12598,7 @@
           <p:cNvPr id="13" name="">
             <a:extLst xmlns:a="http://schemas.openxmlformats.org/drawingml/2006/main">
               <a:ext uri="{FF2B5EF4-FFF2-40B4-BE49-F238E27FC236}">
-                <a16:creationId xmlns:a16="http://schemas.microsoft.com/office/drawing/2014/main" id="{D284B3E8-9262-45C1-8BA1-06CA0AB6198C}"/>
+                <a16:creationId xmlns:a16="http://schemas.microsoft.com/office/drawing/2014/main" id="{2731F720-E568-422A-B262-F73C69E673C9}"/>
               </a:ext>
             </a:extLst>
           </p:cNvPr>
@@ -12455,7 +12655,7 @@
           <p:cNvPr id="14" name="">
             <a:extLst xmlns:a="http://schemas.openxmlformats.org/drawingml/2006/main">
               <a:ext uri="{FF2B5EF4-FFF2-40B4-BE49-F238E27FC236}">
-                <a16:creationId xmlns:a16="http://schemas.microsoft.com/office/drawing/2014/main" id="{4E867918-6723-4FAA-B724-49CBC1A15BF0}"/>
+                <a16:creationId xmlns:a16="http://schemas.microsoft.com/office/drawing/2014/main" id="{2DE4BD1A-39F1-4E17-9B78-38242A7B9FFC}"/>
               </a:ext>
             </a:extLst>
           </p:cNvPr>
@@ -12489,7 +12689,7 @@
           <p:cNvPr id="15" name="">
             <a:extLst xmlns:a="http://schemas.openxmlformats.org/drawingml/2006/main">
               <a:ext uri="{FF2B5EF4-FFF2-40B4-BE49-F238E27FC236}">
-                <a16:creationId xmlns:a16="http://schemas.microsoft.com/office/drawing/2014/main" id="{79ECDD77-5133-45CD-951B-0BA8AD2A7773}"/>
+                <a16:creationId xmlns:a16="http://schemas.microsoft.com/office/drawing/2014/main" id="{2CD01453-53C7-4913-9B4C-A42283A34E76}"/>
               </a:ext>
             </a:extLst>
           </p:cNvPr>
@@ -12521,7 +12721,7 @@
           <p:cNvPr id="16" name="">
             <a:extLst xmlns:a="http://schemas.openxmlformats.org/drawingml/2006/main">
               <a:ext uri="{FF2B5EF4-FFF2-40B4-BE49-F238E27FC236}">
-                <a16:creationId xmlns:a16="http://schemas.microsoft.com/office/drawing/2014/main" id="{442CB04A-E347-4DD8-B5D0-335AA772782D}"/>
+                <a16:creationId xmlns:a16="http://schemas.microsoft.com/office/drawing/2014/main" id="{642975D2-24EC-4AD3-87B6-05BECF816F8C}"/>
               </a:ext>
             </a:extLst>
           </p:cNvPr>
@@ -12578,7 +12778,7 @@
           <p:cNvPr id="17" name="">
             <a:extLst xmlns:a="http://schemas.openxmlformats.org/drawingml/2006/main">
               <a:ext uri="{FF2B5EF4-FFF2-40B4-BE49-F238E27FC236}">
-                <a16:creationId xmlns:a16="http://schemas.microsoft.com/office/drawing/2014/main" id="{10FF1FE0-0B57-4BDD-978C-EABB0A97A80A}"/>
+                <a16:creationId xmlns:a16="http://schemas.microsoft.com/office/drawing/2014/main" id="{49743B2C-B59F-4D7F-AFF6-58450872C5FB}"/>
               </a:ext>
             </a:extLst>
           </p:cNvPr>
@@ -12635,7 +12835,7 @@
           <p:cNvPr id="18" name="">
             <a:extLst xmlns:a="http://schemas.openxmlformats.org/drawingml/2006/main">
               <a:ext uri="{FF2B5EF4-FFF2-40B4-BE49-F238E27FC236}">
-                <a16:creationId xmlns:a16="http://schemas.microsoft.com/office/drawing/2014/main" id="{A49328A5-3035-4406-91D4-EB4EF59AA6F7}"/>
+                <a16:creationId xmlns:a16="http://schemas.microsoft.com/office/drawing/2014/main" id="{4AC7F350-2B4E-4AEA-92C7-0CA0D708A267}"/>
               </a:ext>
             </a:extLst>
           </p:cNvPr>
@@ -12669,7 +12869,7 @@
           <p:cNvPr id="19" name="">
             <a:extLst xmlns:a="http://schemas.openxmlformats.org/drawingml/2006/main">
               <a:ext uri="{FF2B5EF4-FFF2-40B4-BE49-F238E27FC236}">
-                <a16:creationId xmlns:a16="http://schemas.microsoft.com/office/drawing/2014/main" id="{938D0A6C-2778-4114-BF7F-CE74D85EFD02}"/>
+                <a16:creationId xmlns:a16="http://schemas.microsoft.com/office/drawing/2014/main" id="{7B6263D3-DAAF-4AFF-ADE5-3C15173886BC}"/>
               </a:ext>
             </a:extLst>
           </p:cNvPr>
@@ -12701,7 +12901,7 @@
           <p:cNvPr id="20" name="">
             <a:extLst xmlns:a="http://schemas.openxmlformats.org/drawingml/2006/main">
               <a:ext uri="{FF2B5EF4-FFF2-40B4-BE49-F238E27FC236}">
-                <a16:creationId xmlns:a16="http://schemas.microsoft.com/office/drawing/2014/main" id="{CDA110AB-8DE8-49C0-92BA-18E388627AE3}"/>
+                <a16:creationId xmlns:a16="http://schemas.microsoft.com/office/drawing/2014/main" id="{6DC0016D-C030-44CB-A88B-2A28B3B9DF28}"/>
               </a:ext>
             </a:extLst>
           </p:cNvPr>
@@ -12758,7 +12958,7 @@
           <p:cNvPr id="21" name="">
             <a:extLst xmlns:a="http://schemas.openxmlformats.org/drawingml/2006/main">
               <a:ext uri="{FF2B5EF4-FFF2-40B4-BE49-F238E27FC236}">
-                <a16:creationId xmlns:a16="http://schemas.microsoft.com/office/drawing/2014/main" id="{6A833E96-D27E-4499-A2BF-CEF0CE33B2DD}"/>
+                <a16:creationId xmlns:a16="http://schemas.microsoft.com/office/drawing/2014/main" id="{4CD417E0-3A66-4556-B644-D449885D0FD6}"/>
               </a:ext>
             </a:extLst>
           </p:cNvPr>
@@ -12815,7 +13015,7 @@
           <p:cNvPr id="22" name="">
             <a:extLst xmlns:a="http://schemas.openxmlformats.org/drawingml/2006/main">
               <a:ext uri="{FF2B5EF4-FFF2-40B4-BE49-F238E27FC236}">
-                <a16:creationId xmlns:a16="http://schemas.microsoft.com/office/drawing/2014/main" id="{68FCCEBD-3A2A-4FE1-B412-8A60767D9622}"/>
+                <a16:creationId xmlns:a16="http://schemas.microsoft.com/office/drawing/2014/main" id="{A8C4F5DD-97BE-4B4A-90E6-246230F7868C}"/>
               </a:ext>
             </a:extLst>
           </p:cNvPr>
@@ -12870,7 +13070,7 @@
     </p:spTree>
     <p:extLst>
       <p:ext uri="{BB962C8B-B14F-4D97-AF65-F5344CB8AC3E}">
-        <p14:creationId xmlns:p14="http://schemas.microsoft.com/office/powerpoint/2010/main" val="290302152"/>
+        <p14:creationId xmlns:p14="http://schemas.microsoft.com/office/powerpoint/2010/main" val="149842499"/>
       </p:ext>
     </p:extLst>
   </p:cSld>
@@ -13071,7 +13271,7 @@
           <p:cNvPr id="22" name="">
             <a:extLst xmlns:a="http://schemas.openxmlformats.org/drawingml/2006/main">
               <a:ext uri="{FF2B5EF4-FFF2-40B4-BE49-F238E27FC236}">
-                <a16:creationId xmlns:a16="http://schemas.microsoft.com/office/drawing/2014/main" id="{84DD9281-6DE6-41E8-9F7A-A848911DD8CF}"/>
+                <a16:creationId xmlns:a16="http://schemas.microsoft.com/office/drawing/2014/main" id="{5056F5A4-975B-4B41-B3A5-08410266B793}"/>
               </a:ext>
             </a:extLst>
           </p:cNvPr>
@@ -13103,7 +13303,7 @@
           <p:cNvPr id="2" name="">
             <a:extLst xmlns:a="http://schemas.openxmlformats.org/drawingml/2006/main">
               <a:ext uri="{FF2B5EF4-FFF2-40B4-BE49-F238E27FC236}">
-                <a16:creationId xmlns:a16="http://schemas.microsoft.com/office/drawing/2014/main" id="{F8C13ECC-9554-453A-A727-D0B8286ED2B6}"/>
+                <a16:creationId xmlns:a16="http://schemas.microsoft.com/office/drawing/2014/main" id="{5EA09A08-AE8B-43A6-942A-C02A1F905EDB}"/>
               </a:ext>
             </a:extLst>
           </p:cNvPr>
@@ -13160,7 +13360,7 @@
           <p:cNvPr id="3" name="">
             <a:extLst xmlns:a="http://schemas.openxmlformats.org/drawingml/2006/main">
               <a:ext uri="{FF2B5EF4-FFF2-40B4-BE49-F238E27FC236}">
-                <a16:creationId xmlns:a16="http://schemas.microsoft.com/office/drawing/2014/main" id="{5EF173E5-F398-4094-9A43-5EEB6275E24A}"/>
+                <a16:creationId xmlns:a16="http://schemas.microsoft.com/office/drawing/2014/main" id="{2FFB87D9-9441-4D68-8ADB-0DA64033361F}"/>
               </a:ext>
             </a:extLst>
           </p:cNvPr>
@@ -13192,7 +13392,7 @@
           <p:cNvPr id="4" name="">
             <a:extLst xmlns:a="http://schemas.openxmlformats.org/drawingml/2006/main">
               <a:ext uri="{FF2B5EF4-FFF2-40B4-BE49-F238E27FC236}">
-                <a16:creationId xmlns:a16="http://schemas.microsoft.com/office/drawing/2014/main" id="{2F9CDE00-41DF-42E8-A337-3B108253B4C5}"/>
+                <a16:creationId xmlns:a16="http://schemas.microsoft.com/office/drawing/2014/main" id="{830FD8BC-4F62-47D2-B442-9C79D32515AC}"/>
               </a:ext>
             </a:extLst>
           </p:cNvPr>
@@ -13249,7 +13449,7 @@
           <p:cNvPr id="5" name="">
             <a:extLst xmlns:a="http://schemas.openxmlformats.org/drawingml/2006/main">
               <a:ext uri="{FF2B5EF4-FFF2-40B4-BE49-F238E27FC236}">
-                <a16:creationId xmlns:a16="http://schemas.microsoft.com/office/drawing/2014/main" id="{AE524779-8A2B-4271-B53F-818A46573046}"/>
+                <a16:creationId xmlns:a16="http://schemas.microsoft.com/office/drawing/2014/main" id="{ECB283D0-4CB1-4F49-829E-C942EF361512}"/>
               </a:ext>
             </a:extLst>
           </p:cNvPr>
@@ -13306,7 +13506,7 @@
           <p:cNvPr id="6" name="">
             <a:extLst xmlns:a="http://schemas.openxmlformats.org/drawingml/2006/main">
               <a:ext uri="{FF2B5EF4-FFF2-40B4-BE49-F238E27FC236}">
-                <a16:creationId xmlns:a16="http://schemas.microsoft.com/office/drawing/2014/main" id="{A0D24EB9-97C1-4B8D-98BF-8CCC266AA153}"/>
+                <a16:creationId xmlns:a16="http://schemas.microsoft.com/office/drawing/2014/main" id="{1AD3F3E1-9B49-47B4-A4D2-B6AE45AFE08F}"/>
               </a:ext>
             </a:extLst>
           </p:cNvPr>
@@ -13363,7 +13563,7 @@
           <p:cNvPr id="7" name="">
             <a:extLst xmlns:a="http://schemas.openxmlformats.org/drawingml/2006/main">
               <a:ext uri="{FF2B5EF4-FFF2-40B4-BE49-F238E27FC236}">
-                <a16:creationId xmlns:a16="http://schemas.microsoft.com/office/drawing/2014/main" id="{F08B193C-051C-4A44-A677-6F5E30971887}"/>
+                <a16:creationId xmlns:a16="http://schemas.microsoft.com/office/drawing/2014/main" id="{DE461B7F-11D7-42B4-B5EA-478275C4B290}"/>
               </a:ext>
             </a:extLst>
           </p:cNvPr>
@@ -13395,7 +13595,7 @@
           <p:cNvPr id="8" name="">
             <a:extLst xmlns:a="http://schemas.openxmlformats.org/drawingml/2006/main">
               <a:ext uri="{FF2B5EF4-FFF2-40B4-BE49-F238E27FC236}">
-                <a16:creationId xmlns:a16="http://schemas.microsoft.com/office/drawing/2014/main" id="{90D67CAC-D30A-48F1-9283-019C9729EF69}"/>
+                <a16:creationId xmlns:a16="http://schemas.microsoft.com/office/drawing/2014/main" id="{B6BDA5EE-73AA-45DE-9E1D-2C976EA217A4}"/>
               </a:ext>
             </a:extLst>
           </p:cNvPr>
@@ -13452,7 +13652,7 @@
           <p:cNvPr id="9" name="">
             <a:extLst xmlns:a="http://schemas.openxmlformats.org/drawingml/2006/main">
               <a:ext uri="{FF2B5EF4-FFF2-40B4-BE49-F238E27FC236}">
-                <a16:creationId xmlns:a16="http://schemas.microsoft.com/office/drawing/2014/main" id="{67900E9D-D6E8-469D-AB8E-82219FBF6EFC}"/>
+                <a16:creationId xmlns:a16="http://schemas.microsoft.com/office/drawing/2014/main" id="{14010DBC-9273-419B-8878-CB062A3D4209}"/>
               </a:ext>
             </a:extLst>
           </p:cNvPr>
@@ -13509,7 +13709,7 @@
           <p:cNvPr id="10" name="">
             <a:extLst xmlns:a="http://schemas.openxmlformats.org/drawingml/2006/main">
               <a:ext uri="{FF2B5EF4-FFF2-40B4-BE49-F238E27FC236}">
-                <a16:creationId xmlns:a16="http://schemas.microsoft.com/office/drawing/2014/main" id="{51455104-09C6-445A-90CF-483C42DA8420}"/>
+                <a16:creationId xmlns:a16="http://schemas.microsoft.com/office/drawing/2014/main" id="{5EA16C3B-1A19-4F08-882F-96BD5325B299}"/>
               </a:ext>
             </a:extLst>
           </p:cNvPr>
@@ -13543,7 +13743,7 @@
           <p:cNvPr id="11" name="">
             <a:extLst xmlns:a="http://schemas.openxmlformats.org/drawingml/2006/main">
               <a:ext uri="{FF2B5EF4-FFF2-40B4-BE49-F238E27FC236}">
-                <a16:creationId xmlns:a16="http://schemas.microsoft.com/office/drawing/2014/main" id="{37B133E4-2374-404D-8195-DDA55BB792F7}"/>
+                <a16:creationId xmlns:a16="http://schemas.microsoft.com/office/drawing/2014/main" id="{619BF247-6DA4-489C-ADAF-E1259BABCB71}"/>
               </a:ext>
             </a:extLst>
           </p:cNvPr>
@@ -13575,7 +13775,7 @@
           <p:cNvPr id="12" name="">
             <a:extLst xmlns:a="http://schemas.openxmlformats.org/drawingml/2006/main">
               <a:ext uri="{FF2B5EF4-FFF2-40B4-BE49-F238E27FC236}">
-                <a16:creationId xmlns:a16="http://schemas.microsoft.com/office/drawing/2014/main" id="{361090F3-B172-4D85-8824-D2D0DE1B212D}"/>
+                <a16:creationId xmlns:a16="http://schemas.microsoft.com/office/drawing/2014/main" id="{7505FE8B-5530-47F3-851F-BD3BBC0A61D1}"/>
               </a:ext>
             </a:extLst>
           </p:cNvPr>
@@ -13632,7 +13832,7 @@
           <p:cNvPr id="13" name="">
             <a:extLst xmlns:a="http://schemas.openxmlformats.org/drawingml/2006/main">
               <a:ext uri="{FF2B5EF4-FFF2-40B4-BE49-F238E27FC236}">
-                <a16:creationId xmlns:a16="http://schemas.microsoft.com/office/drawing/2014/main" id="{1C12167C-F0BA-4B7C-9104-AB29687D30D7}"/>
+                <a16:creationId xmlns:a16="http://schemas.microsoft.com/office/drawing/2014/main" id="{924B6B53-ACD8-492F-BCC5-2DDB1E00A03E}"/>
               </a:ext>
             </a:extLst>
           </p:cNvPr>
@@ -13689,7 +13889,7 @@
           <p:cNvPr id="14" name="">
             <a:extLst xmlns:a="http://schemas.openxmlformats.org/drawingml/2006/main">
               <a:ext uri="{FF2B5EF4-FFF2-40B4-BE49-F238E27FC236}">
-                <a16:creationId xmlns:a16="http://schemas.microsoft.com/office/drawing/2014/main" id="{F89052F0-C302-472A-9C8A-BCB0AE8DB814}"/>
+                <a16:creationId xmlns:a16="http://schemas.microsoft.com/office/drawing/2014/main" id="{7FDD1BFC-9388-4BAB-BA10-94D161E958ED}"/>
               </a:ext>
             </a:extLst>
           </p:cNvPr>
@@ -13723,7 +13923,7 @@
           <p:cNvPr id="15" name="">
             <a:extLst xmlns:a="http://schemas.openxmlformats.org/drawingml/2006/main">
               <a:ext uri="{FF2B5EF4-FFF2-40B4-BE49-F238E27FC236}">
-                <a16:creationId xmlns:a16="http://schemas.microsoft.com/office/drawing/2014/main" id="{8D6D766A-5FDF-4DB0-B537-3AD43ED11801}"/>
+                <a16:creationId xmlns:a16="http://schemas.microsoft.com/office/drawing/2014/main" id="{B44FCF85-391F-4C13-A7F9-4AE6436F352A}"/>
               </a:ext>
             </a:extLst>
           </p:cNvPr>
@@ -13755,7 +13955,7 @@
           <p:cNvPr id="16" name="">
             <a:extLst xmlns:a="http://schemas.openxmlformats.org/drawingml/2006/main">
               <a:ext uri="{FF2B5EF4-FFF2-40B4-BE49-F238E27FC236}">
-                <a16:creationId xmlns:a16="http://schemas.microsoft.com/office/drawing/2014/main" id="{ACDB79F2-D168-4E36-975B-5A6C8CACBB16}"/>
+                <a16:creationId xmlns:a16="http://schemas.microsoft.com/office/drawing/2014/main" id="{B4EB7A85-3934-471A-899A-3CB6EAD695AA}"/>
               </a:ext>
             </a:extLst>
           </p:cNvPr>
@@ -13812,7 +14012,7 @@
           <p:cNvPr id="17" name="">
             <a:extLst xmlns:a="http://schemas.openxmlformats.org/drawingml/2006/main">
               <a:ext uri="{FF2B5EF4-FFF2-40B4-BE49-F238E27FC236}">
-                <a16:creationId xmlns:a16="http://schemas.microsoft.com/office/drawing/2014/main" id="{276E2AA4-65C1-49C9-9A0D-7E73D65135D1}"/>
+                <a16:creationId xmlns:a16="http://schemas.microsoft.com/office/drawing/2014/main" id="{3750B8EA-7A4B-4A98-B3D3-8EB96F392E56}"/>
               </a:ext>
             </a:extLst>
           </p:cNvPr>
@@ -13869,7 +14069,7 @@
           <p:cNvPr id="18" name="">
             <a:extLst xmlns:a="http://schemas.openxmlformats.org/drawingml/2006/main">
               <a:ext uri="{FF2B5EF4-FFF2-40B4-BE49-F238E27FC236}">
-                <a16:creationId xmlns:a16="http://schemas.microsoft.com/office/drawing/2014/main" id="{93951BCD-ECDB-4BCB-BDA8-1394427B7687}"/>
+                <a16:creationId xmlns:a16="http://schemas.microsoft.com/office/drawing/2014/main" id="{7A6718B4-8771-40D3-AFA7-32B93E8EA3A5}"/>
               </a:ext>
             </a:extLst>
           </p:cNvPr>
@@ -13903,7 +14103,7 @@
           <p:cNvPr id="19" name="">
             <a:extLst xmlns:a="http://schemas.openxmlformats.org/drawingml/2006/main">
               <a:ext uri="{FF2B5EF4-FFF2-40B4-BE49-F238E27FC236}">
-                <a16:creationId xmlns:a16="http://schemas.microsoft.com/office/drawing/2014/main" id="{00B60BE5-5153-4B56-AC8D-607220B0DA04}"/>
+                <a16:creationId xmlns:a16="http://schemas.microsoft.com/office/drawing/2014/main" id="{62DA4BFB-02F2-41A9-902D-1FA2F73D94D6}"/>
               </a:ext>
             </a:extLst>
           </p:cNvPr>
@@ -13935,7 +14135,7 @@
           <p:cNvPr id="20" name="">
             <a:extLst xmlns:a="http://schemas.openxmlformats.org/drawingml/2006/main">
               <a:ext uri="{FF2B5EF4-FFF2-40B4-BE49-F238E27FC236}">
-                <a16:creationId xmlns:a16="http://schemas.microsoft.com/office/drawing/2014/main" id="{A350EFC0-53C0-4E84-9D7C-BC5F2426CD8C}"/>
+                <a16:creationId xmlns:a16="http://schemas.microsoft.com/office/drawing/2014/main" id="{A12CC828-686D-4DD2-A852-ED09211E1EF5}"/>
               </a:ext>
             </a:extLst>
           </p:cNvPr>
@@ -13992,7 +14192,7 @@
           <p:cNvPr id="21" name="">
             <a:extLst xmlns:a="http://schemas.openxmlformats.org/drawingml/2006/main">
               <a:ext uri="{FF2B5EF4-FFF2-40B4-BE49-F238E27FC236}">
-                <a16:creationId xmlns:a16="http://schemas.microsoft.com/office/drawing/2014/main" id="{86B8689B-C8D7-4B39-BC22-84AB279F2EE6}"/>
+                <a16:creationId xmlns:a16="http://schemas.microsoft.com/office/drawing/2014/main" id="{F3FABD1A-EBBD-4909-97E4-16C425E76509}"/>
               </a:ext>
             </a:extLst>
           </p:cNvPr>
@@ -14047,7 +14247,7 @@
     </p:spTree>
     <p:extLst>
       <p:ext uri="{BB962C8B-B14F-4D97-AF65-F5344CB8AC3E}">
-        <p14:creationId xmlns:p14="http://schemas.microsoft.com/office/powerpoint/2010/main" val="424590762"/>
+        <p14:creationId xmlns:p14="http://schemas.microsoft.com/office/powerpoint/2010/main" val="389492701"/>
       </p:ext>
     </p:extLst>
   </p:cSld>
